--- a/books/Refactoring/session/Refactoring_part2.pptx
+++ b/books/Refactoring/session/Refactoring_part2.pptx
@@ -2,21 +2,15 @@
 <file path=ppt/presentation.xml><?xml version="1.0" encoding="utf-8"?>
 <p:presentation xmlns:a="http://schemas.openxmlformats.org/drawingml/2006/main" xmlns:r="http://schemas.openxmlformats.org/officeDocument/2006/relationships" xmlns:p="http://schemas.openxmlformats.org/presentationml/2006/main" saveSubsetFonts="1" autoCompressPictures="0">
   <p:sldMasterIdLst>
-    <p:sldMasterId id="2147483648" r:id="rId1"/>
+    <p:sldMasterId id="2147483771" r:id="rId1"/>
   </p:sldMasterIdLst>
   <p:notesMasterIdLst>
-    <p:notesMasterId r:id="rId11"/>
+    <p:notesMasterId r:id="rId5"/>
   </p:notesMasterIdLst>
   <p:sldIdLst>
     <p:sldId id="256" r:id="rId2"/>
-    <p:sldId id="276" r:id="rId3"/>
-    <p:sldId id="269" r:id="rId4"/>
-    <p:sldId id="270" r:id="rId5"/>
-    <p:sldId id="271" r:id="rId6"/>
-    <p:sldId id="272" r:id="rId7"/>
-    <p:sldId id="265" r:id="rId8"/>
-    <p:sldId id="260" r:id="rId9"/>
-    <p:sldId id="277" r:id="rId10"/>
+    <p:sldId id="260" r:id="rId3"/>
+    <p:sldId id="277" r:id="rId4"/>
   </p:sldIdLst>
   <p:sldSz cx="12192000" cy="6858000"/>
   <p:notesSz cx="6858000" cy="9144000"/>
@@ -205,7 +199,7 @@
           <a:p>
             <a:fld id="{3D7383F5-6C25-4144-BB9C-7D6DC74B2771}" type="datetimeFigureOut">
               <a:rPr lang="en-CN" smtClean="0"/>
-              <a:t>2020/10/15</a:t>
+              <a:t>2021/5/18</a:t>
             </a:fld>
             <a:endParaRPr lang="en-CN"/>
           </a:p>
@@ -495,7 +489,7 @@
           <p:cNvPr id="2" name="Title 1">
             <a:extLst>
               <a:ext uri="{FF2B5EF4-FFF2-40B4-BE49-F238E27FC236}">
-                <a16:creationId xmlns:a16="http://schemas.microsoft.com/office/drawing/2014/main" id="{262933C0-A38E-D84F-A756-631AD78F633A}"/>
+                <a16:creationId xmlns:a16="http://schemas.microsoft.com/office/drawing/2014/main" id="{087A7AF6-028C-5E47-813F-E35EABFC56AA}"/>
               </a:ext>
             </a:extLst>
           </p:cNvPr>
@@ -533,7 +527,7 @@
           <p:cNvPr id="3" name="Subtitle 2">
             <a:extLst>
               <a:ext uri="{FF2B5EF4-FFF2-40B4-BE49-F238E27FC236}">
-                <a16:creationId xmlns:a16="http://schemas.microsoft.com/office/drawing/2014/main" id="{74437F2E-375E-0342-A57F-1E26AB73404E}"/>
+                <a16:creationId xmlns:a16="http://schemas.microsoft.com/office/drawing/2014/main" id="{6A009D8B-189E-EA4A-A537-BFE190504AC5}"/>
               </a:ext>
             </a:extLst>
           </p:cNvPr>
@@ -604,7 +598,7 @@
           <p:cNvPr id="4" name="Date Placeholder 3">
             <a:extLst>
               <a:ext uri="{FF2B5EF4-FFF2-40B4-BE49-F238E27FC236}">
-                <a16:creationId xmlns:a16="http://schemas.microsoft.com/office/drawing/2014/main" id="{A01D7580-7641-D543-8107-3CBF36EA7AD6}"/>
+                <a16:creationId xmlns:a16="http://schemas.microsoft.com/office/drawing/2014/main" id="{78117FDA-522C-E646-A12C-90DA654C37AF}"/>
               </a:ext>
             </a:extLst>
           </p:cNvPr>
@@ -622,7 +616,7 @@
           <a:p>
             <a:fld id="{CE81EC24-67D7-F647-A9BD-542708036C5D}" type="datetimeFigureOut">
               <a:rPr lang="en-CN" smtClean="0"/>
-              <a:t>2020/10/15</a:t>
+              <a:t>2021/5/18</a:t>
             </a:fld>
             <a:endParaRPr lang="en-CN"/>
           </a:p>
@@ -633,7 +627,7 @@
           <p:cNvPr id="5" name="Footer Placeholder 4">
             <a:extLst>
               <a:ext uri="{FF2B5EF4-FFF2-40B4-BE49-F238E27FC236}">
-                <a16:creationId xmlns:a16="http://schemas.microsoft.com/office/drawing/2014/main" id="{19DEB274-E2A7-BC45-93C7-BDA9360CA775}"/>
+                <a16:creationId xmlns:a16="http://schemas.microsoft.com/office/drawing/2014/main" id="{51135DC4-5BEE-534F-8EBD-C37394E21DFD}"/>
               </a:ext>
             </a:extLst>
           </p:cNvPr>
@@ -658,7 +652,7 @@
           <p:cNvPr id="6" name="Slide Number Placeholder 5">
             <a:extLst>
               <a:ext uri="{FF2B5EF4-FFF2-40B4-BE49-F238E27FC236}">
-                <a16:creationId xmlns:a16="http://schemas.microsoft.com/office/drawing/2014/main" id="{1535A3E1-B41A-844B-B82D-7B2F93815318}"/>
+                <a16:creationId xmlns:a16="http://schemas.microsoft.com/office/drawing/2014/main" id="{7CBBF26D-41FC-264D-BA62-1D2A9BE4973E}"/>
               </a:ext>
             </a:extLst>
           </p:cNvPr>
@@ -685,7 +679,7 @@
     </p:spTree>
     <p:extLst>
       <p:ext uri="{BB962C8B-B14F-4D97-AF65-F5344CB8AC3E}">
-        <p14:creationId xmlns:p14="http://schemas.microsoft.com/office/powerpoint/2010/main" val="2542689622"/>
+        <p14:creationId xmlns:p14="http://schemas.microsoft.com/office/powerpoint/2010/main" val="3215961203"/>
       </p:ext>
     </p:extLst>
   </p:cSld>
@@ -717,7 +711,7 @@
           <p:cNvPr id="2" name="Title 1">
             <a:extLst>
               <a:ext uri="{FF2B5EF4-FFF2-40B4-BE49-F238E27FC236}">
-                <a16:creationId xmlns:a16="http://schemas.microsoft.com/office/drawing/2014/main" id="{A10286E2-B094-E44F-943B-31C45897F310}"/>
+                <a16:creationId xmlns:a16="http://schemas.microsoft.com/office/drawing/2014/main" id="{5A15977F-3603-2249-99D3-E9635BC0B1B5}"/>
               </a:ext>
             </a:extLst>
           </p:cNvPr>
@@ -746,7 +740,7 @@
           <p:cNvPr id="3" name="Vertical Text Placeholder 2">
             <a:extLst>
               <a:ext uri="{FF2B5EF4-FFF2-40B4-BE49-F238E27FC236}">
-                <a16:creationId xmlns:a16="http://schemas.microsoft.com/office/drawing/2014/main" id="{996459E5-8873-C44B-8027-8DE1BA05A4DB}"/>
+                <a16:creationId xmlns:a16="http://schemas.microsoft.com/office/drawing/2014/main" id="{A9F18ABE-6566-4542-A034-45030A87C42D}"/>
               </a:ext>
             </a:extLst>
           </p:cNvPr>
@@ -804,7 +798,7 @@
           <p:cNvPr id="4" name="Date Placeholder 3">
             <a:extLst>
               <a:ext uri="{FF2B5EF4-FFF2-40B4-BE49-F238E27FC236}">
-                <a16:creationId xmlns:a16="http://schemas.microsoft.com/office/drawing/2014/main" id="{759624DB-C877-BA45-80F5-99A42CE1C338}"/>
+                <a16:creationId xmlns:a16="http://schemas.microsoft.com/office/drawing/2014/main" id="{1CDEDDF5-16D1-9F4D-B524-09AB20C09FFF}"/>
               </a:ext>
             </a:extLst>
           </p:cNvPr>
@@ -822,7 +816,7 @@
           <a:p>
             <a:fld id="{CE81EC24-67D7-F647-A9BD-542708036C5D}" type="datetimeFigureOut">
               <a:rPr lang="en-CN" smtClean="0"/>
-              <a:t>2020/10/15</a:t>
+              <a:t>2021/5/18</a:t>
             </a:fld>
             <a:endParaRPr lang="en-CN"/>
           </a:p>
@@ -833,7 +827,7 @@
           <p:cNvPr id="5" name="Footer Placeholder 4">
             <a:extLst>
               <a:ext uri="{FF2B5EF4-FFF2-40B4-BE49-F238E27FC236}">
-                <a16:creationId xmlns:a16="http://schemas.microsoft.com/office/drawing/2014/main" id="{5DDE8BD5-AB73-1945-BB46-6D594C590A7C}"/>
+                <a16:creationId xmlns:a16="http://schemas.microsoft.com/office/drawing/2014/main" id="{C13E5193-4E2B-604A-8798-E66F1639C2CA}"/>
               </a:ext>
             </a:extLst>
           </p:cNvPr>
@@ -858,7 +852,7 @@
           <p:cNvPr id="6" name="Slide Number Placeholder 5">
             <a:extLst>
               <a:ext uri="{FF2B5EF4-FFF2-40B4-BE49-F238E27FC236}">
-                <a16:creationId xmlns:a16="http://schemas.microsoft.com/office/drawing/2014/main" id="{AB1759E6-11D6-5B4C-BB6C-AC8A8D87C8F8}"/>
+                <a16:creationId xmlns:a16="http://schemas.microsoft.com/office/drawing/2014/main" id="{4C05AD77-E3A3-BF46-A130-8B0EBAE8300C}"/>
               </a:ext>
             </a:extLst>
           </p:cNvPr>
@@ -885,7 +879,7 @@
     </p:spTree>
     <p:extLst>
       <p:ext uri="{BB962C8B-B14F-4D97-AF65-F5344CB8AC3E}">
-        <p14:creationId xmlns:p14="http://schemas.microsoft.com/office/powerpoint/2010/main" val="308601451"/>
+        <p14:creationId xmlns:p14="http://schemas.microsoft.com/office/powerpoint/2010/main" val="2666193298"/>
       </p:ext>
     </p:extLst>
   </p:cSld>
@@ -917,7 +911,7 @@
           <p:cNvPr id="2" name="Vertical Title 1">
             <a:extLst>
               <a:ext uri="{FF2B5EF4-FFF2-40B4-BE49-F238E27FC236}">
-                <a16:creationId xmlns:a16="http://schemas.microsoft.com/office/drawing/2014/main" id="{94F50848-5555-1446-A961-13FAB2EFEA7C}"/>
+                <a16:creationId xmlns:a16="http://schemas.microsoft.com/office/drawing/2014/main" id="{4430B886-60CF-AC43-B093-17F4C4BBBFC8}"/>
               </a:ext>
             </a:extLst>
           </p:cNvPr>
@@ -951,7 +945,7 @@
           <p:cNvPr id="3" name="Vertical Text Placeholder 2">
             <a:extLst>
               <a:ext uri="{FF2B5EF4-FFF2-40B4-BE49-F238E27FC236}">
-                <a16:creationId xmlns:a16="http://schemas.microsoft.com/office/drawing/2014/main" id="{361903C5-97A4-7547-9727-148106E670A1}"/>
+                <a16:creationId xmlns:a16="http://schemas.microsoft.com/office/drawing/2014/main" id="{B579B817-40D1-0740-AFE8-732B5A2BAC64}"/>
               </a:ext>
             </a:extLst>
           </p:cNvPr>
@@ -1014,7 +1008,7 @@
           <p:cNvPr id="4" name="Date Placeholder 3">
             <a:extLst>
               <a:ext uri="{FF2B5EF4-FFF2-40B4-BE49-F238E27FC236}">
-                <a16:creationId xmlns:a16="http://schemas.microsoft.com/office/drawing/2014/main" id="{30BC98F1-3F27-804E-A482-34999685E55D}"/>
+                <a16:creationId xmlns:a16="http://schemas.microsoft.com/office/drawing/2014/main" id="{79E1C801-C00E-2441-9D66-717D120018E7}"/>
               </a:ext>
             </a:extLst>
           </p:cNvPr>
@@ -1032,7 +1026,7 @@
           <a:p>
             <a:fld id="{CE81EC24-67D7-F647-A9BD-542708036C5D}" type="datetimeFigureOut">
               <a:rPr lang="en-CN" smtClean="0"/>
-              <a:t>2020/10/15</a:t>
+              <a:t>2021/5/18</a:t>
             </a:fld>
             <a:endParaRPr lang="en-CN"/>
           </a:p>
@@ -1043,7 +1037,7 @@
           <p:cNvPr id="5" name="Footer Placeholder 4">
             <a:extLst>
               <a:ext uri="{FF2B5EF4-FFF2-40B4-BE49-F238E27FC236}">
-                <a16:creationId xmlns:a16="http://schemas.microsoft.com/office/drawing/2014/main" id="{D0B693C1-9613-5046-B65F-5F05A2DC62FF}"/>
+                <a16:creationId xmlns:a16="http://schemas.microsoft.com/office/drawing/2014/main" id="{0FAF16F9-18BE-DE4C-A3D3-FF668205008F}"/>
               </a:ext>
             </a:extLst>
           </p:cNvPr>
@@ -1068,7 +1062,7 @@
           <p:cNvPr id="6" name="Slide Number Placeholder 5">
             <a:extLst>
               <a:ext uri="{FF2B5EF4-FFF2-40B4-BE49-F238E27FC236}">
-                <a16:creationId xmlns:a16="http://schemas.microsoft.com/office/drawing/2014/main" id="{17E6D075-898A-FA4E-BAA8-A1C8B7D16C4E}"/>
+                <a16:creationId xmlns:a16="http://schemas.microsoft.com/office/drawing/2014/main" id="{9897BC4C-1EC4-454E-9AFB-D99E58702D27}"/>
               </a:ext>
             </a:extLst>
           </p:cNvPr>
@@ -1095,7 +1089,7 @@
     </p:spTree>
     <p:extLst>
       <p:ext uri="{BB962C8B-B14F-4D97-AF65-F5344CB8AC3E}">
-        <p14:creationId xmlns:p14="http://schemas.microsoft.com/office/powerpoint/2010/main" val="1354628591"/>
+        <p14:creationId xmlns:p14="http://schemas.microsoft.com/office/powerpoint/2010/main" val="2264643416"/>
       </p:ext>
     </p:extLst>
   </p:cSld>
@@ -1127,7 +1121,7 @@
           <p:cNvPr id="2" name="Title 1">
             <a:extLst>
               <a:ext uri="{FF2B5EF4-FFF2-40B4-BE49-F238E27FC236}">
-                <a16:creationId xmlns:a16="http://schemas.microsoft.com/office/drawing/2014/main" id="{DDB79787-0D03-2645-9639-DD6F129E9179}"/>
+                <a16:creationId xmlns:a16="http://schemas.microsoft.com/office/drawing/2014/main" id="{529C8CD9-8500-944D-BE12-FBA99A1EC8A0}"/>
               </a:ext>
             </a:extLst>
           </p:cNvPr>
@@ -1156,7 +1150,7 @@
           <p:cNvPr id="3" name="Content Placeholder 2">
             <a:extLst>
               <a:ext uri="{FF2B5EF4-FFF2-40B4-BE49-F238E27FC236}">
-                <a16:creationId xmlns:a16="http://schemas.microsoft.com/office/drawing/2014/main" id="{4DD8A130-6E4C-2148-9A8D-B55194B8163E}"/>
+                <a16:creationId xmlns:a16="http://schemas.microsoft.com/office/drawing/2014/main" id="{53F1A85D-9E3B-CD4B-9217-E3E9ECA43025}"/>
               </a:ext>
             </a:extLst>
           </p:cNvPr>
@@ -1214,7 +1208,7 @@
           <p:cNvPr id="4" name="Date Placeholder 3">
             <a:extLst>
               <a:ext uri="{FF2B5EF4-FFF2-40B4-BE49-F238E27FC236}">
-                <a16:creationId xmlns:a16="http://schemas.microsoft.com/office/drawing/2014/main" id="{91434B7F-13FA-5F44-AC32-1BAAE84DFB35}"/>
+                <a16:creationId xmlns:a16="http://schemas.microsoft.com/office/drawing/2014/main" id="{957251E9-3464-3647-A484-1D2D8C6FC28A}"/>
               </a:ext>
             </a:extLst>
           </p:cNvPr>
@@ -1232,7 +1226,7 @@
           <a:p>
             <a:fld id="{CE81EC24-67D7-F647-A9BD-542708036C5D}" type="datetimeFigureOut">
               <a:rPr lang="en-CN" smtClean="0"/>
-              <a:t>2020/10/15</a:t>
+              <a:t>2021/5/18</a:t>
             </a:fld>
             <a:endParaRPr lang="en-CN"/>
           </a:p>
@@ -1243,7 +1237,7 @@
           <p:cNvPr id="5" name="Footer Placeholder 4">
             <a:extLst>
               <a:ext uri="{FF2B5EF4-FFF2-40B4-BE49-F238E27FC236}">
-                <a16:creationId xmlns:a16="http://schemas.microsoft.com/office/drawing/2014/main" id="{EF5E7DBF-E5A8-8D4B-90F0-DB1EC1F2683A}"/>
+                <a16:creationId xmlns:a16="http://schemas.microsoft.com/office/drawing/2014/main" id="{67D8DF4C-1A57-B442-A89D-552984917A79}"/>
               </a:ext>
             </a:extLst>
           </p:cNvPr>
@@ -1268,7 +1262,7 @@
           <p:cNvPr id="6" name="Slide Number Placeholder 5">
             <a:extLst>
               <a:ext uri="{FF2B5EF4-FFF2-40B4-BE49-F238E27FC236}">
-                <a16:creationId xmlns:a16="http://schemas.microsoft.com/office/drawing/2014/main" id="{02A8F358-304D-BF4F-BFC5-F602D355DEEA}"/>
+                <a16:creationId xmlns:a16="http://schemas.microsoft.com/office/drawing/2014/main" id="{5ED3030C-8358-FB4A-AB30-7F39E6AD4200}"/>
               </a:ext>
             </a:extLst>
           </p:cNvPr>
@@ -1295,7 +1289,7 @@
     </p:spTree>
     <p:extLst>
       <p:ext uri="{BB962C8B-B14F-4D97-AF65-F5344CB8AC3E}">
-        <p14:creationId xmlns:p14="http://schemas.microsoft.com/office/powerpoint/2010/main" val="3095536168"/>
+        <p14:creationId xmlns:p14="http://schemas.microsoft.com/office/powerpoint/2010/main" val="557924348"/>
       </p:ext>
     </p:extLst>
   </p:cSld>
@@ -1327,7 +1321,7 @@
           <p:cNvPr id="2" name="Title 1">
             <a:extLst>
               <a:ext uri="{FF2B5EF4-FFF2-40B4-BE49-F238E27FC236}">
-                <a16:creationId xmlns:a16="http://schemas.microsoft.com/office/drawing/2014/main" id="{ACE600C3-C97B-6745-AE6D-75668804FD05}"/>
+                <a16:creationId xmlns:a16="http://schemas.microsoft.com/office/drawing/2014/main" id="{4F0D462A-A74F-1F4C-96EA-5812A70BAF2E}"/>
               </a:ext>
             </a:extLst>
           </p:cNvPr>
@@ -1365,7 +1359,7 @@
           <p:cNvPr id="3" name="Text Placeholder 2">
             <a:extLst>
               <a:ext uri="{FF2B5EF4-FFF2-40B4-BE49-F238E27FC236}">
-                <a16:creationId xmlns:a16="http://schemas.microsoft.com/office/drawing/2014/main" id="{7C074EC2-AC21-C14E-AFB9-05206E1ADC3F}"/>
+                <a16:creationId xmlns:a16="http://schemas.microsoft.com/office/drawing/2014/main" id="{A28548DC-4B58-F046-A3FD-577DF4B081FC}"/>
               </a:ext>
             </a:extLst>
           </p:cNvPr>
@@ -1490,7 +1484,7 @@
           <p:cNvPr id="4" name="Date Placeholder 3">
             <a:extLst>
               <a:ext uri="{FF2B5EF4-FFF2-40B4-BE49-F238E27FC236}">
-                <a16:creationId xmlns:a16="http://schemas.microsoft.com/office/drawing/2014/main" id="{35AD63D5-B6DD-7D4C-937A-A57CA8C92912}"/>
+                <a16:creationId xmlns:a16="http://schemas.microsoft.com/office/drawing/2014/main" id="{D53CDF7F-B229-8B41-9180-415724633D43}"/>
               </a:ext>
             </a:extLst>
           </p:cNvPr>
@@ -1508,7 +1502,7 @@
           <a:p>
             <a:fld id="{CE81EC24-67D7-F647-A9BD-542708036C5D}" type="datetimeFigureOut">
               <a:rPr lang="en-CN" smtClean="0"/>
-              <a:t>2020/10/15</a:t>
+              <a:t>2021/5/18</a:t>
             </a:fld>
             <a:endParaRPr lang="en-CN"/>
           </a:p>
@@ -1519,7 +1513,7 @@
           <p:cNvPr id="5" name="Footer Placeholder 4">
             <a:extLst>
               <a:ext uri="{FF2B5EF4-FFF2-40B4-BE49-F238E27FC236}">
-                <a16:creationId xmlns:a16="http://schemas.microsoft.com/office/drawing/2014/main" id="{A75E78C9-DF9C-8E42-A982-8743645FFB41}"/>
+                <a16:creationId xmlns:a16="http://schemas.microsoft.com/office/drawing/2014/main" id="{7413D640-0217-3544-B4E3-9D8D5C1044BD}"/>
               </a:ext>
             </a:extLst>
           </p:cNvPr>
@@ -1544,7 +1538,7 @@
           <p:cNvPr id="6" name="Slide Number Placeholder 5">
             <a:extLst>
               <a:ext uri="{FF2B5EF4-FFF2-40B4-BE49-F238E27FC236}">
-                <a16:creationId xmlns:a16="http://schemas.microsoft.com/office/drawing/2014/main" id="{DE8D1AD2-F776-C249-8F4E-457B9776AF05}"/>
+                <a16:creationId xmlns:a16="http://schemas.microsoft.com/office/drawing/2014/main" id="{AD48E49D-74D7-5F4D-A4C2-0C8657EEB239}"/>
               </a:ext>
             </a:extLst>
           </p:cNvPr>
@@ -1571,7 +1565,7 @@
     </p:spTree>
     <p:extLst>
       <p:ext uri="{BB962C8B-B14F-4D97-AF65-F5344CB8AC3E}">
-        <p14:creationId xmlns:p14="http://schemas.microsoft.com/office/powerpoint/2010/main" val="876163796"/>
+        <p14:creationId xmlns:p14="http://schemas.microsoft.com/office/powerpoint/2010/main" val="674017277"/>
       </p:ext>
     </p:extLst>
   </p:cSld>
@@ -1603,7 +1597,7 @@
           <p:cNvPr id="2" name="Title 1">
             <a:extLst>
               <a:ext uri="{FF2B5EF4-FFF2-40B4-BE49-F238E27FC236}">
-                <a16:creationId xmlns:a16="http://schemas.microsoft.com/office/drawing/2014/main" id="{88295ACA-07D4-DE4A-8B26-A5B91EA8DBB4}"/>
+                <a16:creationId xmlns:a16="http://schemas.microsoft.com/office/drawing/2014/main" id="{82F18122-6F6B-F24B-9C42-F904FE9ADE9C}"/>
               </a:ext>
             </a:extLst>
           </p:cNvPr>
@@ -1632,7 +1626,7 @@
           <p:cNvPr id="3" name="Content Placeholder 2">
             <a:extLst>
               <a:ext uri="{FF2B5EF4-FFF2-40B4-BE49-F238E27FC236}">
-                <a16:creationId xmlns:a16="http://schemas.microsoft.com/office/drawing/2014/main" id="{E5522D45-57E2-6542-8F32-20EAA80779AA}"/>
+                <a16:creationId xmlns:a16="http://schemas.microsoft.com/office/drawing/2014/main" id="{8A2EFCDB-6CAB-5940-A4B1-ED03AC4DAE07}"/>
               </a:ext>
             </a:extLst>
           </p:cNvPr>
@@ -1695,7 +1689,7 @@
           <p:cNvPr id="4" name="Content Placeholder 3">
             <a:extLst>
               <a:ext uri="{FF2B5EF4-FFF2-40B4-BE49-F238E27FC236}">
-                <a16:creationId xmlns:a16="http://schemas.microsoft.com/office/drawing/2014/main" id="{E623CB33-9F96-2D48-A777-3568BC4A902D}"/>
+                <a16:creationId xmlns:a16="http://schemas.microsoft.com/office/drawing/2014/main" id="{9FD0D475-0626-2F44-8DCC-2A091A017945}"/>
               </a:ext>
             </a:extLst>
           </p:cNvPr>
@@ -1758,7 +1752,7 @@
           <p:cNvPr id="5" name="Date Placeholder 4">
             <a:extLst>
               <a:ext uri="{FF2B5EF4-FFF2-40B4-BE49-F238E27FC236}">
-                <a16:creationId xmlns:a16="http://schemas.microsoft.com/office/drawing/2014/main" id="{66A55AD6-6C2B-0841-A15D-A66D27775295}"/>
+                <a16:creationId xmlns:a16="http://schemas.microsoft.com/office/drawing/2014/main" id="{9C2DB2B8-9C48-7942-93A6-27E662D5BABE}"/>
               </a:ext>
             </a:extLst>
           </p:cNvPr>
@@ -1776,7 +1770,7 @@
           <a:p>
             <a:fld id="{CE81EC24-67D7-F647-A9BD-542708036C5D}" type="datetimeFigureOut">
               <a:rPr lang="en-CN" smtClean="0"/>
-              <a:t>2020/10/15</a:t>
+              <a:t>2021/5/18</a:t>
             </a:fld>
             <a:endParaRPr lang="en-CN"/>
           </a:p>
@@ -1787,7 +1781,7 @@
           <p:cNvPr id="6" name="Footer Placeholder 5">
             <a:extLst>
               <a:ext uri="{FF2B5EF4-FFF2-40B4-BE49-F238E27FC236}">
-                <a16:creationId xmlns:a16="http://schemas.microsoft.com/office/drawing/2014/main" id="{5C47254C-ED60-D349-BB57-B6A02F71CED0}"/>
+                <a16:creationId xmlns:a16="http://schemas.microsoft.com/office/drawing/2014/main" id="{9DB9A665-1850-2A49-AEED-73133BE0DEEE}"/>
               </a:ext>
             </a:extLst>
           </p:cNvPr>
@@ -1812,7 +1806,7 @@
           <p:cNvPr id="7" name="Slide Number Placeholder 6">
             <a:extLst>
               <a:ext uri="{FF2B5EF4-FFF2-40B4-BE49-F238E27FC236}">
-                <a16:creationId xmlns:a16="http://schemas.microsoft.com/office/drawing/2014/main" id="{A0F89CAE-45E8-C044-9F3A-80D4301E16ED}"/>
+                <a16:creationId xmlns:a16="http://schemas.microsoft.com/office/drawing/2014/main" id="{F4A10100-009F-9641-95B1-F74F3051570F}"/>
               </a:ext>
             </a:extLst>
           </p:cNvPr>
@@ -1839,7 +1833,7 @@
     </p:spTree>
     <p:extLst>
       <p:ext uri="{BB962C8B-B14F-4D97-AF65-F5344CB8AC3E}">
-        <p14:creationId xmlns:p14="http://schemas.microsoft.com/office/powerpoint/2010/main" val="2759783718"/>
+        <p14:creationId xmlns:p14="http://schemas.microsoft.com/office/powerpoint/2010/main" val="2475534019"/>
       </p:ext>
     </p:extLst>
   </p:cSld>
@@ -1871,7 +1865,7 @@
           <p:cNvPr id="2" name="Title 1">
             <a:extLst>
               <a:ext uri="{FF2B5EF4-FFF2-40B4-BE49-F238E27FC236}">
-                <a16:creationId xmlns:a16="http://schemas.microsoft.com/office/drawing/2014/main" id="{BD33A67F-387F-FA45-B620-DA35D167BA52}"/>
+                <a16:creationId xmlns:a16="http://schemas.microsoft.com/office/drawing/2014/main" id="{1B3F5651-590C-FD4B-A1D6-E69CEFA7171F}"/>
               </a:ext>
             </a:extLst>
           </p:cNvPr>
@@ -1905,7 +1899,7 @@
           <p:cNvPr id="3" name="Text Placeholder 2">
             <a:extLst>
               <a:ext uri="{FF2B5EF4-FFF2-40B4-BE49-F238E27FC236}">
-                <a16:creationId xmlns:a16="http://schemas.microsoft.com/office/drawing/2014/main" id="{97B36AC8-6AC8-D746-A45C-6294E8FED988}"/>
+                <a16:creationId xmlns:a16="http://schemas.microsoft.com/office/drawing/2014/main" id="{5D448EFD-B135-5F41-A488-C6B78C05B0BA}"/>
               </a:ext>
             </a:extLst>
           </p:cNvPr>
@@ -1976,7 +1970,7 @@
           <p:cNvPr id="4" name="Content Placeholder 3">
             <a:extLst>
               <a:ext uri="{FF2B5EF4-FFF2-40B4-BE49-F238E27FC236}">
-                <a16:creationId xmlns:a16="http://schemas.microsoft.com/office/drawing/2014/main" id="{62CC3628-BA27-1E4D-AED8-A40C9F5CD6B1}"/>
+                <a16:creationId xmlns:a16="http://schemas.microsoft.com/office/drawing/2014/main" id="{4AC1EFD7-CF8A-B641-8351-B547E26ECE6D}"/>
               </a:ext>
             </a:extLst>
           </p:cNvPr>
@@ -2039,7 +2033,7 @@
           <p:cNvPr id="5" name="Text Placeholder 4">
             <a:extLst>
               <a:ext uri="{FF2B5EF4-FFF2-40B4-BE49-F238E27FC236}">
-                <a16:creationId xmlns:a16="http://schemas.microsoft.com/office/drawing/2014/main" id="{F3E9AD60-D6FE-7A40-A1C7-13DE375CB3B8}"/>
+                <a16:creationId xmlns:a16="http://schemas.microsoft.com/office/drawing/2014/main" id="{55022FC0-9C99-864C-A45E-D1530F043287}"/>
               </a:ext>
             </a:extLst>
           </p:cNvPr>
@@ -2110,7 +2104,7 @@
           <p:cNvPr id="6" name="Content Placeholder 5">
             <a:extLst>
               <a:ext uri="{FF2B5EF4-FFF2-40B4-BE49-F238E27FC236}">
-                <a16:creationId xmlns:a16="http://schemas.microsoft.com/office/drawing/2014/main" id="{F673B5B9-A03C-5D4A-8331-1B354E3EAF63}"/>
+                <a16:creationId xmlns:a16="http://schemas.microsoft.com/office/drawing/2014/main" id="{17D15AC3-797E-2F4D-A642-67577FD7049F}"/>
               </a:ext>
             </a:extLst>
           </p:cNvPr>
@@ -2173,7 +2167,7 @@
           <p:cNvPr id="7" name="Date Placeholder 6">
             <a:extLst>
               <a:ext uri="{FF2B5EF4-FFF2-40B4-BE49-F238E27FC236}">
-                <a16:creationId xmlns:a16="http://schemas.microsoft.com/office/drawing/2014/main" id="{31B92426-4DAA-CF45-9528-F1B9A20250E1}"/>
+                <a16:creationId xmlns:a16="http://schemas.microsoft.com/office/drawing/2014/main" id="{4D8E9284-1FCA-D14B-89D5-5EB0B3BCFD69}"/>
               </a:ext>
             </a:extLst>
           </p:cNvPr>
@@ -2191,7 +2185,7 @@
           <a:p>
             <a:fld id="{CE81EC24-67D7-F647-A9BD-542708036C5D}" type="datetimeFigureOut">
               <a:rPr lang="en-CN" smtClean="0"/>
-              <a:t>2020/10/15</a:t>
+              <a:t>2021/5/18</a:t>
             </a:fld>
             <a:endParaRPr lang="en-CN"/>
           </a:p>
@@ -2202,7 +2196,7 @@
           <p:cNvPr id="8" name="Footer Placeholder 7">
             <a:extLst>
               <a:ext uri="{FF2B5EF4-FFF2-40B4-BE49-F238E27FC236}">
-                <a16:creationId xmlns:a16="http://schemas.microsoft.com/office/drawing/2014/main" id="{CC4AB5FF-09B8-DE41-940F-270B102902AF}"/>
+                <a16:creationId xmlns:a16="http://schemas.microsoft.com/office/drawing/2014/main" id="{B0A89D1B-7D79-1C4B-8C53-F720E8E04716}"/>
               </a:ext>
             </a:extLst>
           </p:cNvPr>
@@ -2227,7 +2221,7 @@
           <p:cNvPr id="9" name="Slide Number Placeholder 8">
             <a:extLst>
               <a:ext uri="{FF2B5EF4-FFF2-40B4-BE49-F238E27FC236}">
-                <a16:creationId xmlns:a16="http://schemas.microsoft.com/office/drawing/2014/main" id="{9566D13F-700B-4E4A-95B4-103622EADC0C}"/>
+                <a16:creationId xmlns:a16="http://schemas.microsoft.com/office/drawing/2014/main" id="{033BAB01-86DB-F44F-8C06-A2EF9537E521}"/>
               </a:ext>
             </a:extLst>
           </p:cNvPr>
@@ -2254,7 +2248,7 @@
     </p:spTree>
     <p:extLst>
       <p:ext uri="{BB962C8B-B14F-4D97-AF65-F5344CB8AC3E}">
-        <p14:creationId xmlns:p14="http://schemas.microsoft.com/office/powerpoint/2010/main" val="2703766701"/>
+        <p14:creationId xmlns:p14="http://schemas.microsoft.com/office/powerpoint/2010/main" val="2877830526"/>
       </p:ext>
     </p:extLst>
   </p:cSld>
@@ -2286,7 +2280,7 @@
           <p:cNvPr id="2" name="Title 1">
             <a:extLst>
               <a:ext uri="{FF2B5EF4-FFF2-40B4-BE49-F238E27FC236}">
-                <a16:creationId xmlns:a16="http://schemas.microsoft.com/office/drawing/2014/main" id="{87D3DD39-03ED-434D-B85B-0C6D52425F3C}"/>
+                <a16:creationId xmlns:a16="http://schemas.microsoft.com/office/drawing/2014/main" id="{D0424F4A-4AEC-1340-8C4E-A8E830D56A66}"/>
               </a:ext>
             </a:extLst>
           </p:cNvPr>
@@ -2315,7 +2309,7 @@
           <p:cNvPr id="3" name="Date Placeholder 2">
             <a:extLst>
               <a:ext uri="{FF2B5EF4-FFF2-40B4-BE49-F238E27FC236}">
-                <a16:creationId xmlns:a16="http://schemas.microsoft.com/office/drawing/2014/main" id="{3B5ED734-7165-564A-B72D-CCC009FBF627}"/>
+                <a16:creationId xmlns:a16="http://schemas.microsoft.com/office/drawing/2014/main" id="{D4EBF115-C6DF-F94D-B376-2CDFC88CC9D8}"/>
               </a:ext>
             </a:extLst>
           </p:cNvPr>
@@ -2333,7 +2327,7 @@
           <a:p>
             <a:fld id="{CE81EC24-67D7-F647-A9BD-542708036C5D}" type="datetimeFigureOut">
               <a:rPr lang="en-CN" smtClean="0"/>
-              <a:t>2020/10/15</a:t>
+              <a:t>2021/5/18</a:t>
             </a:fld>
             <a:endParaRPr lang="en-CN"/>
           </a:p>
@@ -2344,7 +2338,7 @@
           <p:cNvPr id="4" name="Footer Placeholder 3">
             <a:extLst>
               <a:ext uri="{FF2B5EF4-FFF2-40B4-BE49-F238E27FC236}">
-                <a16:creationId xmlns:a16="http://schemas.microsoft.com/office/drawing/2014/main" id="{BFE29CF7-6EA2-FA46-8177-E3019100BB6E}"/>
+                <a16:creationId xmlns:a16="http://schemas.microsoft.com/office/drawing/2014/main" id="{61EEF076-DAE6-414C-ADB6-9842B9F7F63E}"/>
               </a:ext>
             </a:extLst>
           </p:cNvPr>
@@ -2369,7 +2363,7 @@
           <p:cNvPr id="5" name="Slide Number Placeholder 4">
             <a:extLst>
               <a:ext uri="{FF2B5EF4-FFF2-40B4-BE49-F238E27FC236}">
-                <a16:creationId xmlns:a16="http://schemas.microsoft.com/office/drawing/2014/main" id="{DD5EF33E-3ACD-DE49-8E2C-657AE43A0130}"/>
+                <a16:creationId xmlns:a16="http://schemas.microsoft.com/office/drawing/2014/main" id="{21884307-273D-A043-8F56-C125911B1C66}"/>
               </a:ext>
             </a:extLst>
           </p:cNvPr>
@@ -2396,7 +2390,7 @@
     </p:spTree>
     <p:extLst>
       <p:ext uri="{BB962C8B-B14F-4D97-AF65-F5344CB8AC3E}">
-        <p14:creationId xmlns:p14="http://schemas.microsoft.com/office/powerpoint/2010/main" val="90788484"/>
+        <p14:creationId xmlns:p14="http://schemas.microsoft.com/office/powerpoint/2010/main" val="328759286"/>
       </p:ext>
     </p:extLst>
   </p:cSld>
@@ -2428,7 +2422,7 @@
           <p:cNvPr id="2" name="Date Placeholder 1">
             <a:extLst>
               <a:ext uri="{FF2B5EF4-FFF2-40B4-BE49-F238E27FC236}">
-                <a16:creationId xmlns:a16="http://schemas.microsoft.com/office/drawing/2014/main" id="{AC525C67-F307-1C47-9353-E055E1A1EF89}"/>
+                <a16:creationId xmlns:a16="http://schemas.microsoft.com/office/drawing/2014/main" id="{5DD80646-30A3-7B4B-A301-02ED88D34599}"/>
               </a:ext>
             </a:extLst>
           </p:cNvPr>
@@ -2446,7 +2440,7 @@
           <a:p>
             <a:fld id="{CE81EC24-67D7-F647-A9BD-542708036C5D}" type="datetimeFigureOut">
               <a:rPr lang="en-CN" smtClean="0"/>
-              <a:t>2020/10/15</a:t>
+              <a:t>2021/5/18</a:t>
             </a:fld>
             <a:endParaRPr lang="en-CN"/>
           </a:p>
@@ -2457,7 +2451,7 @@
           <p:cNvPr id="3" name="Footer Placeholder 2">
             <a:extLst>
               <a:ext uri="{FF2B5EF4-FFF2-40B4-BE49-F238E27FC236}">
-                <a16:creationId xmlns:a16="http://schemas.microsoft.com/office/drawing/2014/main" id="{D431D758-E9C7-C54D-9227-87A17102098E}"/>
+                <a16:creationId xmlns:a16="http://schemas.microsoft.com/office/drawing/2014/main" id="{670B1B98-1E39-DC44-8586-2C783DDD70DD}"/>
               </a:ext>
             </a:extLst>
           </p:cNvPr>
@@ -2482,7 +2476,7 @@
           <p:cNvPr id="4" name="Slide Number Placeholder 3">
             <a:extLst>
               <a:ext uri="{FF2B5EF4-FFF2-40B4-BE49-F238E27FC236}">
-                <a16:creationId xmlns:a16="http://schemas.microsoft.com/office/drawing/2014/main" id="{8D17ED29-822D-7648-9850-0C83C386A4C2}"/>
+                <a16:creationId xmlns:a16="http://schemas.microsoft.com/office/drawing/2014/main" id="{A5C18E14-38A1-E94E-AC65-94F7F18478B6}"/>
               </a:ext>
             </a:extLst>
           </p:cNvPr>
@@ -2509,7 +2503,7 @@
     </p:spTree>
     <p:extLst>
       <p:ext uri="{BB962C8B-B14F-4D97-AF65-F5344CB8AC3E}">
-        <p14:creationId xmlns:p14="http://schemas.microsoft.com/office/powerpoint/2010/main" val="1825563469"/>
+        <p14:creationId xmlns:p14="http://schemas.microsoft.com/office/powerpoint/2010/main" val="1796597606"/>
       </p:ext>
     </p:extLst>
   </p:cSld>
@@ -2541,7 +2535,7 @@
           <p:cNvPr id="2" name="Title 1">
             <a:extLst>
               <a:ext uri="{FF2B5EF4-FFF2-40B4-BE49-F238E27FC236}">
-                <a16:creationId xmlns:a16="http://schemas.microsoft.com/office/drawing/2014/main" id="{9FF7AB41-4A4E-354B-BC08-E3074B0402F3}"/>
+                <a16:creationId xmlns:a16="http://schemas.microsoft.com/office/drawing/2014/main" id="{7602E812-7DE4-FF47-A33C-79817B1EFD59}"/>
               </a:ext>
             </a:extLst>
           </p:cNvPr>
@@ -2579,7 +2573,7 @@
           <p:cNvPr id="3" name="Content Placeholder 2">
             <a:extLst>
               <a:ext uri="{FF2B5EF4-FFF2-40B4-BE49-F238E27FC236}">
-                <a16:creationId xmlns:a16="http://schemas.microsoft.com/office/drawing/2014/main" id="{67AD2793-34B2-5B4A-A00F-C46EBED33078}"/>
+                <a16:creationId xmlns:a16="http://schemas.microsoft.com/office/drawing/2014/main" id="{69D5770F-9D79-D24D-974E-6CB1573911FD}"/>
               </a:ext>
             </a:extLst>
           </p:cNvPr>
@@ -2670,7 +2664,7 @@
           <p:cNvPr id="4" name="Text Placeholder 3">
             <a:extLst>
               <a:ext uri="{FF2B5EF4-FFF2-40B4-BE49-F238E27FC236}">
-                <a16:creationId xmlns:a16="http://schemas.microsoft.com/office/drawing/2014/main" id="{80D97A21-5BF3-2B46-A0E6-9D6756F1F077}"/>
+                <a16:creationId xmlns:a16="http://schemas.microsoft.com/office/drawing/2014/main" id="{BE6BBCDA-85B3-DC45-A667-B8D9F918418D}"/>
               </a:ext>
             </a:extLst>
           </p:cNvPr>
@@ -2741,7 +2735,7 @@
           <p:cNvPr id="5" name="Date Placeholder 4">
             <a:extLst>
               <a:ext uri="{FF2B5EF4-FFF2-40B4-BE49-F238E27FC236}">
-                <a16:creationId xmlns:a16="http://schemas.microsoft.com/office/drawing/2014/main" id="{BB1BAB7A-57CE-E740-A61A-2B9D9C986EEC}"/>
+                <a16:creationId xmlns:a16="http://schemas.microsoft.com/office/drawing/2014/main" id="{3EC81228-C5E0-9B40-80EE-187E8F615F79}"/>
               </a:ext>
             </a:extLst>
           </p:cNvPr>
@@ -2759,7 +2753,7 @@
           <a:p>
             <a:fld id="{CE81EC24-67D7-F647-A9BD-542708036C5D}" type="datetimeFigureOut">
               <a:rPr lang="en-CN" smtClean="0"/>
-              <a:t>2020/10/15</a:t>
+              <a:t>2021/5/18</a:t>
             </a:fld>
             <a:endParaRPr lang="en-CN"/>
           </a:p>
@@ -2770,7 +2764,7 @@
           <p:cNvPr id="6" name="Footer Placeholder 5">
             <a:extLst>
               <a:ext uri="{FF2B5EF4-FFF2-40B4-BE49-F238E27FC236}">
-                <a16:creationId xmlns:a16="http://schemas.microsoft.com/office/drawing/2014/main" id="{3709DC29-4064-4442-9836-9AFFF3BFA7E9}"/>
+                <a16:creationId xmlns:a16="http://schemas.microsoft.com/office/drawing/2014/main" id="{4957CFF2-AD47-D948-AAC1-F63D2C93BD23}"/>
               </a:ext>
             </a:extLst>
           </p:cNvPr>
@@ -2795,7 +2789,7 @@
           <p:cNvPr id="7" name="Slide Number Placeholder 6">
             <a:extLst>
               <a:ext uri="{FF2B5EF4-FFF2-40B4-BE49-F238E27FC236}">
-                <a16:creationId xmlns:a16="http://schemas.microsoft.com/office/drawing/2014/main" id="{DEF14248-D9E1-B144-A415-ABF57BE8DB0B}"/>
+                <a16:creationId xmlns:a16="http://schemas.microsoft.com/office/drawing/2014/main" id="{5AA9DD4D-A3EF-744E-867D-301084E80876}"/>
               </a:ext>
             </a:extLst>
           </p:cNvPr>
@@ -2822,7 +2816,7 @@
     </p:spTree>
     <p:extLst>
       <p:ext uri="{BB962C8B-B14F-4D97-AF65-F5344CB8AC3E}">
-        <p14:creationId xmlns:p14="http://schemas.microsoft.com/office/powerpoint/2010/main" val="1275256110"/>
+        <p14:creationId xmlns:p14="http://schemas.microsoft.com/office/powerpoint/2010/main" val="2694541580"/>
       </p:ext>
     </p:extLst>
   </p:cSld>
@@ -2854,7 +2848,7 @@
           <p:cNvPr id="2" name="Title 1">
             <a:extLst>
               <a:ext uri="{FF2B5EF4-FFF2-40B4-BE49-F238E27FC236}">
-                <a16:creationId xmlns:a16="http://schemas.microsoft.com/office/drawing/2014/main" id="{BED1918D-084A-0B4D-AB4F-04E084A4392E}"/>
+                <a16:creationId xmlns:a16="http://schemas.microsoft.com/office/drawing/2014/main" id="{4E302F19-98E0-B64C-9050-AD40493AA5BF}"/>
               </a:ext>
             </a:extLst>
           </p:cNvPr>
@@ -2892,7 +2886,7 @@
           <p:cNvPr id="3" name="Picture Placeholder 2">
             <a:extLst>
               <a:ext uri="{FF2B5EF4-FFF2-40B4-BE49-F238E27FC236}">
-                <a16:creationId xmlns:a16="http://schemas.microsoft.com/office/drawing/2014/main" id="{CC99FDD8-B03D-4A42-B1F8-EC932341B7EC}"/>
+                <a16:creationId xmlns:a16="http://schemas.microsoft.com/office/drawing/2014/main" id="{DDD063A5-62E6-BB49-A1C2-F6BD6CAA61D6}"/>
               </a:ext>
             </a:extLst>
           </p:cNvPr>
@@ -2959,7 +2953,7 @@
           <p:cNvPr id="4" name="Text Placeholder 3">
             <a:extLst>
               <a:ext uri="{FF2B5EF4-FFF2-40B4-BE49-F238E27FC236}">
-                <a16:creationId xmlns:a16="http://schemas.microsoft.com/office/drawing/2014/main" id="{0B365CAD-B047-4B43-A733-D7B97167907D}"/>
+                <a16:creationId xmlns:a16="http://schemas.microsoft.com/office/drawing/2014/main" id="{E0A16733-8D39-8A42-BA35-FE272D7240B3}"/>
               </a:ext>
             </a:extLst>
           </p:cNvPr>
@@ -3030,7 +3024,7 @@
           <p:cNvPr id="5" name="Date Placeholder 4">
             <a:extLst>
               <a:ext uri="{FF2B5EF4-FFF2-40B4-BE49-F238E27FC236}">
-                <a16:creationId xmlns:a16="http://schemas.microsoft.com/office/drawing/2014/main" id="{B4189950-81D0-2143-82BA-66A18ADDB821}"/>
+                <a16:creationId xmlns:a16="http://schemas.microsoft.com/office/drawing/2014/main" id="{4432013C-DD5C-CA43-83FE-3A99D70B7999}"/>
               </a:ext>
             </a:extLst>
           </p:cNvPr>
@@ -3048,7 +3042,7 @@
           <a:p>
             <a:fld id="{CE81EC24-67D7-F647-A9BD-542708036C5D}" type="datetimeFigureOut">
               <a:rPr lang="en-CN" smtClean="0"/>
-              <a:t>2020/10/15</a:t>
+              <a:t>2021/5/18</a:t>
             </a:fld>
             <a:endParaRPr lang="en-CN"/>
           </a:p>
@@ -3059,7 +3053,7 @@
           <p:cNvPr id="6" name="Footer Placeholder 5">
             <a:extLst>
               <a:ext uri="{FF2B5EF4-FFF2-40B4-BE49-F238E27FC236}">
-                <a16:creationId xmlns:a16="http://schemas.microsoft.com/office/drawing/2014/main" id="{6DCC5CB3-CB2B-3841-A44F-92265CC99F1B}"/>
+                <a16:creationId xmlns:a16="http://schemas.microsoft.com/office/drawing/2014/main" id="{377B93D4-6FCE-C945-A567-9C948B4AA899}"/>
               </a:ext>
             </a:extLst>
           </p:cNvPr>
@@ -3084,7 +3078,7 @@
           <p:cNvPr id="7" name="Slide Number Placeholder 6">
             <a:extLst>
               <a:ext uri="{FF2B5EF4-FFF2-40B4-BE49-F238E27FC236}">
-                <a16:creationId xmlns:a16="http://schemas.microsoft.com/office/drawing/2014/main" id="{D1B4EEEC-AEE2-2F41-B8EE-EAE632EEA3AA}"/>
+                <a16:creationId xmlns:a16="http://schemas.microsoft.com/office/drawing/2014/main" id="{3561BC20-DFE4-FB42-BAF8-3A03ADA3712C}"/>
               </a:ext>
             </a:extLst>
           </p:cNvPr>
@@ -3111,7 +3105,7 @@
     </p:spTree>
     <p:extLst>
       <p:ext uri="{BB962C8B-B14F-4D97-AF65-F5344CB8AC3E}">
-        <p14:creationId xmlns:p14="http://schemas.microsoft.com/office/powerpoint/2010/main" val="2176936998"/>
+        <p14:creationId xmlns:p14="http://schemas.microsoft.com/office/powerpoint/2010/main" val="74418072"/>
       </p:ext>
     </p:extLst>
   </p:cSld>
@@ -3148,7 +3142,7 @@
           <p:cNvPr id="2" name="Title Placeholder 1">
             <a:extLst>
               <a:ext uri="{FF2B5EF4-FFF2-40B4-BE49-F238E27FC236}">
-                <a16:creationId xmlns:a16="http://schemas.microsoft.com/office/drawing/2014/main" id="{762C023C-A709-6C4E-BA26-83FFA4BAC77E}"/>
+                <a16:creationId xmlns:a16="http://schemas.microsoft.com/office/drawing/2014/main" id="{2D03A112-BF97-B64F-9C07-4CB6117FB8D3}"/>
               </a:ext>
             </a:extLst>
           </p:cNvPr>
@@ -3187,7 +3181,7 @@
           <p:cNvPr id="3" name="Text Placeholder 2">
             <a:extLst>
               <a:ext uri="{FF2B5EF4-FFF2-40B4-BE49-F238E27FC236}">
-                <a16:creationId xmlns:a16="http://schemas.microsoft.com/office/drawing/2014/main" id="{82006CE1-CD8F-D848-9B8A-F82751D35003}"/>
+                <a16:creationId xmlns:a16="http://schemas.microsoft.com/office/drawing/2014/main" id="{274B409C-E202-5F41-8311-34FBD284CAB6}"/>
               </a:ext>
             </a:extLst>
           </p:cNvPr>
@@ -3255,7 +3249,7 @@
           <p:cNvPr id="4" name="Date Placeholder 3">
             <a:extLst>
               <a:ext uri="{FF2B5EF4-FFF2-40B4-BE49-F238E27FC236}">
-                <a16:creationId xmlns:a16="http://schemas.microsoft.com/office/drawing/2014/main" id="{D2CAB01A-71D4-8142-8B4F-55B6172F0EF6}"/>
+                <a16:creationId xmlns:a16="http://schemas.microsoft.com/office/drawing/2014/main" id="{C7694A3E-B8B1-7847-9E34-BAFD0CBA5EA7}"/>
               </a:ext>
             </a:extLst>
           </p:cNvPr>
@@ -3291,7 +3285,7 @@
           <a:p>
             <a:fld id="{CE81EC24-67D7-F647-A9BD-542708036C5D}" type="datetimeFigureOut">
               <a:rPr lang="en-CN" smtClean="0"/>
-              <a:t>2020/10/15</a:t>
+              <a:t>2021/5/18</a:t>
             </a:fld>
             <a:endParaRPr lang="en-CN"/>
           </a:p>
@@ -3302,7 +3296,7 @@
           <p:cNvPr id="5" name="Footer Placeholder 4">
             <a:extLst>
               <a:ext uri="{FF2B5EF4-FFF2-40B4-BE49-F238E27FC236}">
-                <a16:creationId xmlns:a16="http://schemas.microsoft.com/office/drawing/2014/main" id="{63561908-F454-3C47-A952-01BCCB6203C7}"/>
+                <a16:creationId xmlns:a16="http://schemas.microsoft.com/office/drawing/2014/main" id="{8AD22539-E008-444D-A8B4-0CCCBC61915E}"/>
               </a:ext>
             </a:extLst>
           </p:cNvPr>
@@ -3345,7 +3339,7 @@
           <p:cNvPr id="6" name="Slide Number Placeholder 5">
             <a:extLst>
               <a:ext uri="{FF2B5EF4-FFF2-40B4-BE49-F238E27FC236}">
-                <a16:creationId xmlns:a16="http://schemas.microsoft.com/office/drawing/2014/main" id="{50ED04C9-6219-524C-A628-9E570D401EFF}"/>
+                <a16:creationId xmlns:a16="http://schemas.microsoft.com/office/drawing/2014/main" id="{22A2F4FB-3E1A-534B-B721-E4A94C780F4A}"/>
               </a:ext>
             </a:extLst>
           </p:cNvPr>
@@ -3390,23 +3384,23 @@
     </p:spTree>
     <p:extLst>
       <p:ext uri="{BB962C8B-B14F-4D97-AF65-F5344CB8AC3E}">
-        <p14:creationId xmlns:p14="http://schemas.microsoft.com/office/powerpoint/2010/main" val="4195958949"/>
+        <p14:creationId xmlns:p14="http://schemas.microsoft.com/office/powerpoint/2010/main" val="2019530066"/>
       </p:ext>
     </p:extLst>
   </p:cSld>
   <p:clrMap bg1="lt1" tx1="dk1" bg2="lt2" tx2="dk2" accent1="accent1" accent2="accent2" accent3="accent3" accent4="accent4" accent5="accent5" accent6="accent6" hlink="hlink" folHlink="folHlink"/>
   <p:sldLayoutIdLst>
-    <p:sldLayoutId id="2147483649" r:id="rId1"/>
-    <p:sldLayoutId id="2147483650" r:id="rId2"/>
-    <p:sldLayoutId id="2147483651" r:id="rId3"/>
-    <p:sldLayoutId id="2147483652" r:id="rId4"/>
-    <p:sldLayoutId id="2147483653" r:id="rId5"/>
-    <p:sldLayoutId id="2147483654" r:id="rId6"/>
-    <p:sldLayoutId id="2147483655" r:id="rId7"/>
-    <p:sldLayoutId id="2147483656" r:id="rId8"/>
-    <p:sldLayoutId id="2147483657" r:id="rId9"/>
-    <p:sldLayoutId id="2147483658" r:id="rId10"/>
-    <p:sldLayoutId id="2147483659" r:id="rId11"/>
+    <p:sldLayoutId id="2147483772" r:id="rId1"/>
+    <p:sldLayoutId id="2147483773" r:id="rId2"/>
+    <p:sldLayoutId id="2147483774" r:id="rId3"/>
+    <p:sldLayoutId id="2147483775" r:id="rId4"/>
+    <p:sldLayoutId id="2147483776" r:id="rId5"/>
+    <p:sldLayoutId id="2147483777" r:id="rId6"/>
+    <p:sldLayoutId id="2147483778" r:id="rId7"/>
+    <p:sldLayoutId id="2147483779" r:id="rId8"/>
+    <p:sldLayoutId id="2147483780" r:id="rId9"/>
+    <p:sldLayoutId id="2147483781" r:id="rId10"/>
+    <p:sldLayoutId id="2147483782" r:id="rId11"/>
   </p:sldLayoutIdLst>
   <p:txStyles>
     <p:titleStyle>
@@ -3694,6 +3688,14 @@
 <file path=ppt/slides/slide1.xml><?xml version="1.0" encoding="utf-8"?>
 <p:sld xmlns:a="http://schemas.openxmlformats.org/drawingml/2006/main" xmlns:r="http://schemas.openxmlformats.org/officeDocument/2006/relationships" xmlns:p="http://schemas.openxmlformats.org/presentationml/2006/main">
   <p:cSld>
+    <p:bg>
+      <p:bgPr>
+        <a:solidFill>
+          <a:schemeClr val="bg1"/>
+        </a:solidFill>
+        <a:effectLst/>
+      </p:bgPr>
+    </p:bg>
     <p:spTree>
       <p:nvGrpSpPr>
         <p:cNvPr id="1" name=""/>
@@ -3724,23 +3726,47 @@
             <p:ph type="ctrTitle"/>
           </p:nvPr>
         </p:nvSpPr>
-        <p:spPr/>
-        <p:txBody>
-          <a:bodyPr/>
+        <p:spPr>
+          <a:xfrm>
+            <a:off x="3204642" y="2353641"/>
+            <a:ext cx="5782716" cy="2150719"/>
+          </a:xfrm>
+          <a:noFill/>
+        </p:spPr>
+        <p:txBody>
+          <a:bodyPr anchor="ctr">
+            <a:normAutofit/>
+          </a:bodyPr>
           <a:lstStyle/>
           <a:p>
             <a:r>
-              <a:rPr lang="en-US" dirty="0"/>
+              <a:rPr lang="en-US" sz="3600" dirty="0">
+                <a:solidFill>
+                  <a:srgbClr val="080808"/>
+                </a:solidFill>
+              </a:rPr>
               <a:t>Refactoring</a:t>
             </a:r>
             <a:br>
-              <a:rPr lang="en-US" dirty="0"/>
+              <a:rPr lang="en-US" sz="3600" dirty="0">
+                <a:solidFill>
+                  <a:srgbClr val="080808"/>
+                </a:solidFill>
+              </a:rPr>
             </a:br>
             <a:r>
-              <a:rPr lang="en-US" dirty="0"/>
+              <a:rPr lang="en-US" sz="3600" dirty="0">
+                <a:solidFill>
+                  <a:srgbClr val="080808"/>
+                </a:solidFill>
+              </a:rPr>
               <a:t>Part2</a:t>
             </a:r>
-            <a:endParaRPr lang="en-CN" dirty="0"/>
+            <a:endParaRPr lang="en-CN" sz="3600" dirty="0">
+              <a:solidFill>
+                <a:srgbClr val="080808"/>
+              </a:solidFill>
+            </a:endParaRPr>
           </a:p>
         </p:txBody>
       </p:sp>
@@ -3760,7 +3786,13 @@
             <p:ph type="subTitle" idx="1"/>
           </p:nvPr>
         </p:nvSpPr>
-        <p:spPr/>
+        <p:spPr>
+          <a:xfrm>
+            <a:off x="4439633" y="4518923"/>
+            <a:ext cx="3312734" cy="1141851"/>
+          </a:xfrm>
+          <a:noFill/>
+        </p:spPr>
         <p:txBody>
           <a:bodyPr>
             <a:normAutofit/>
@@ -3768,29 +3800,57 @@
           <a:lstStyle/>
           <a:p>
             <a:r>
-              <a:rPr lang="en-US" b="1" dirty="0"/>
+              <a:rPr lang="en-US" sz="1100" b="1" dirty="0">
+                <a:solidFill>
+                  <a:srgbClr val="080808"/>
+                </a:solidFill>
+              </a:rPr>
               <a:t>Improve the design of existing code</a:t>
             </a:r>
-            <a:endParaRPr lang="en-US" dirty="0"/>
-          </a:p>
-          <a:p>
-            <a:r>
-              <a:rPr lang="en-US" b="1" dirty="0"/>
+            <a:endParaRPr lang="en-US" sz="1100" dirty="0">
+              <a:solidFill>
+                <a:srgbClr val="080808"/>
+              </a:solidFill>
+            </a:endParaRPr>
+          </a:p>
+          <a:p>
+            <a:r>
+              <a:rPr lang="en-US" sz="1100" b="1" dirty="0">
+                <a:solidFill>
+                  <a:srgbClr val="080808"/>
+                </a:solidFill>
+              </a:rPr>
               <a:t>Martin  Flower</a:t>
             </a:r>
-            <a:endParaRPr lang="en-US" dirty="0"/>
-          </a:p>
-          <a:p>
-            <a:endParaRPr lang="en-CN" dirty="0"/>
-          </a:p>
-          <a:p>
-            <a:r>
-              <a:rPr lang="en-US" sz="1200" dirty="0"/>
-              <a:t>Vicky, 2020/11/13</a:t>
-            </a:r>
-          </a:p>
-          <a:p>
-            <a:endParaRPr lang="en-CN" dirty="0"/>
+            <a:endParaRPr lang="en-US" sz="1100" dirty="0">
+              <a:solidFill>
+                <a:srgbClr val="080808"/>
+              </a:solidFill>
+            </a:endParaRPr>
+          </a:p>
+          <a:p>
+            <a:endParaRPr lang="en-CN" sz="1100" dirty="0">
+              <a:solidFill>
+                <a:srgbClr val="080808"/>
+              </a:solidFill>
+            </a:endParaRPr>
+          </a:p>
+          <a:p>
+            <a:r>
+              <a:rPr lang="en-US" sz="1100" dirty="0">
+                <a:solidFill>
+                  <a:srgbClr val="080808"/>
+                </a:solidFill>
+              </a:rPr>
+              <a:t>Vicky, 2020/5/17</a:t>
+            </a:r>
+          </a:p>
+          <a:p>
+            <a:endParaRPr lang="en-CN" sz="1100" dirty="0">
+              <a:solidFill>
+                <a:srgbClr val="080808"/>
+              </a:solidFill>
+            </a:endParaRPr>
           </a:p>
         </p:txBody>
       </p:sp>
@@ -3829,1310 +3889,6 @@
           <p:cNvPr id="2" name="Title 1">
             <a:extLst>
               <a:ext uri="{FF2B5EF4-FFF2-40B4-BE49-F238E27FC236}">
-                <a16:creationId xmlns:a16="http://schemas.microsoft.com/office/drawing/2014/main" id="{148FEFDC-EB2B-794A-959D-929CF1456472}"/>
-              </a:ext>
-            </a:extLst>
-          </p:cNvPr>
-          <p:cNvSpPr>
-            <a:spLocks noGrp="1"/>
-          </p:cNvSpPr>
-          <p:nvPr>
-            <p:ph type="title"/>
-          </p:nvPr>
-        </p:nvSpPr>
-        <p:spPr/>
-        <p:txBody>
-          <a:bodyPr/>
-          <a:lstStyle/>
-          <a:p>
-            <a:r>
-              <a:rPr lang="zh-CN" altLang="en-US" b="1" dirty="0"/>
-              <a:t>哪些迹象表明何时必须重构 </a:t>
-            </a:r>
-            <a:r>
-              <a:rPr lang="en-US" altLang="zh-CN" b="1" dirty="0"/>
-              <a:t>–</a:t>
-            </a:r>
-            <a:r>
-              <a:rPr lang="zh-CN" altLang="en-US" b="1" dirty="0"/>
-              <a:t> </a:t>
-            </a:r>
-            <a:r>
-              <a:rPr lang="en-US" altLang="zh-CN" b="1" dirty="0"/>
-              <a:t>22/22</a:t>
-            </a:r>
-            <a:endParaRPr lang="en-CN" dirty="0"/>
-          </a:p>
-        </p:txBody>
-      </p:sp>
-      <p:sp>
-        <p:nvSpPr>
-          <p:cNvPr id="3" name="Content Placeholder 2">
-            <a:extLst>
-              <a:ext uri="{FF2B5EF4-FFF2-40B4-BE49-F238E27FC236}">
-                <a16:creationId xmlns:a16="http://schemas.microsoft.com/office/drawing/2014/main" id="{FB0BC6C5-0462-7344-9A14-EB80CF0A5CFB}"/>
-              </a:ext>
-            </a:extLst>
-          </p:cNvPr>
-          <p:cNvSpPr>
-            <a:spLocks noGrp="1"/>
-          </p:cNvSpPr>
-          <p:nvPr>
-            <p:ph idx="1"/>
-          </p:nvPr>
-        </p:nvSpPr>
-        <p:spPr/>
-        <p:txBody>
-          <a:bodyPr>
-            <a:normAutofit fontScale="92500" lnSpcReduction="20000"/>
-          </a:bodyPr>
-          <a:lstStyle/>
-          <a:p>
-            <a:r>
-              <a:rPr lang="en-US" dirty="0"/>
-              <a:t>Speculative Generality（</a:t>
-            </a:r>
-            <a:r>
-              <a:rPr lang="zh-CN" altLang="en-US" dirty="0"/>
-              <a:t>夸夸其谈未来性）</a:t>
-            </a:r>
-          </a:p>
-          <a:p>
-            <a:r>
-              <a:rPr lang="en-US" dirty="0">
-                <a:highlight>
-                  <a:srgbClr val="00FF00"/>
-                </a:highlight>
-              </a:rPr>
-              <a:t>Temporary Field（</a:t>
-            </a:r>
-            <a:r>
-              <a:rPr lang="zh-CN" altLang="en-US" dirty="0">
-                <a:highlight>
-                  <a:srgbClr val="00FF00"/>
-                </a:highlight>
-              </a:rPr>
-              <a:t>令人迷惑的暂时字段）</a:t>
-            </a:r>
-          </a:p>
-          <a:p>
-            <a:r>
-              <a:rPr lang="en-US" dirty="0"/>
-              <a:t>Message Chains（</a:t>
-            </a:r>
-            <a:r>
-              <a:rPr lang="zh-CN" altLang="en-US" dirty="0"/>
-              <a:t>过度耦合的消息链）</a:t>
-            </a:r>
-          </a:p>
-          <a:p>
-            <a:r>
-              <a:rPr lang="en-US" dirty="0"/>
-              <a:t>Middle Man（</a:t>
-            </a:r>
-            <a:r>
-              <a:rPr lang="zh-CN" altLang="en-US" dirty="0"/>
-              <a:t>中间人）</a:t>
-            </a:r>
-            <a:endParaRPr lang="en-US" altLang="zh-CN" dirty="0"/>
-          </a:p>
-          <a:p>
-            <a:r>
-              <a:rPr lang="en-US" altLang="zh-CN" dirty="0"/>
-              <a:t>Inappropriate Intimacy</a:t>
-            </a:r>
-            <a:r>
-              <a:rPr lang="zh-CN" altLang="en-US" dirty="0"/>
-              <a:t>（狎昵关系）</a:t>
-            </a:r>
-          </a:p>
-          <a:p>
-            <a:r>
-              <a:rPr lang="en-US" altLang="zh-CN" dirty="0"/>
-              <a:t>Alternate Classes with Different Interfaces</a:t>
-            </a:r>
-            <a:r>
-              <a:rPr lang="zh-CN" altLang="en-US" dirty="0"/>
-              <a:t>（异曲同工的类</a:t>
-            </a:r>
-            <a:r>
-              <a:rPr lang="en-US" altLang="zh-CN" dirty="0"/>
-              <a:t>)</a:t>
-            </a:r>
-          </a:p>
-          <a:p>
-            <a:r>
-              <a:rPr lang="en-US" altLang="zh-CN" dirty="0"/>
-              <a:t>Incomplete Library Class</a:t>
-            </a:r>
-            <a:r>
-              <a:rPr lang="zh-CN" altLang="en-US" dirty="0"/>
-              <a:t>（不完美的库类</a:t>
-            </a:r>
-            <a:r>
-              <a:rPr lang="en-US" altLang="zh-CN" dirty="0"/>
-              <a:t>)</a:t>
-            </a:r>
-          </a:p>
-          <a:p>
-            <a:r>
-              <a:rPr lang="en-US" altLang="zh-CN" dirty="0"/>
-              <a:t>Data Class</a:t>
-            </a:r>
-            <a:r>
-              <a:rPr lang="zh-CN" altLang="en-US" dirty="0"/>
-              <a:t>（纯雅的数据类）</a:t>
-            </a:r>
-          </a:p>
-          <a:p>
-            <a:r>
-              <a:rPr lang="en-US" altLang="zh-CN" dirty="0"/>
-              <a:t>Refused Bequest</a:t>
-            </a:r>
-            <a:r>
-              <a:rPr lang="zh-CN" altLang="en-US" dirty="0"/>
-              <a:t>（被拒绝的馈赠）</a:t>
-            </a:r>
-            <a:endParaRPr lang="en-US" altLang="zh-CN" dirty="0"/>
-          </a:p>
-          <a:p>
-            <a:r>
-              <a:rPr lang="en-US" altLang="zh-CN" dirty="0"/>
-              <a:t>Comments</a:t>
-            </a:r>
-            <a:r>
-              <a:rPr lang="zh-CN" altLang="en-US" dirty="0"/>
-              <a:t>（过多的注释）</a:t>
-            </a:r>
-            <a:endParaRPr lang="en-US" altLang="zh-CN" dirty="0"/>
-          </a:p>
-          <a:p>
-            <a:endParaRPr lang="zh-CN" altLang="en-US" dirty="0"/>
-          </a:p>
-          <a:p>
-            <a:endParaRPr lang="en-CN" dirty="0"/>
-          </a:p>
-        </p:txBody>
-      </p:sp>
-    </p:spTree>
-    <p:extLst>
-      <p:ext uri="{BB962C8B-B14F-4D97-AF65-F5344CB8AC3E}">
-        <p14:creationId xmlns:p14="http://schemas.microsoft.com/office/powerpoint/2010/main" val="4010781902"/>
-      </p:ext>
-    </p:extLst>
-  </p:cSld>
-  <p:clrMapOvr>
-    <a:masterClrMapping/>
-  </p:clrMapOvr>
-</p:sld>
-</file>
-
-<file path=ppt/slides/slide3.xml><?xml version="1.0" encoding="utf-8"?>
-<p:sld xmlns:a="http://schemas.openxmlformats.org/drawingml/2006/main" xmlns:r="http://schemas.openxmlformats.org/officeDocument/2006/relationships" xmlns:p="http://schemas.openxmlformats.org/presentationml/2006/main">
-  <p:cSld>
-    <p:spTree>
-      <p:nvGrpSpPr>
-        <p:cNvPr id="1" name=""/>
-        <p:cNvGrpSpPr/>
-        <p:nvPr/>
-      </p:nvGrpSpPr>
-      <p:grpSpPr>
-        <a:xfrm>
-          <a:off x="0" y="0"/>
-          <a:ext cx="0" cy="0"/>
-          <a:chOff x="0" y="0"/>
-          <a:chExt cx="0" cy="0"/>
-        </a:xfrm>
-      </p:grpSpPr>
-      <p:sp>
-        <p:nvSpPr>
-          <p:cNvPr id="2" name="Title 1">
-            <a:extLst>
-              <a:ext uri="{FF2B5EF4-FFF2-40B4-BE49-F238E27FC236}">
-                <a16:creationId xmlns:a16="http://schemas.microsoft.com/office/drawing/2014/main" id="{13DC53F3-43F6-5543-813C-6910213D37B6}"/>
-              </a:ext>
-            </a:extLst>
-          </p:cNvPr>
-          <p:cNvSpPr>
-            <a:spLocks noGrp="1"/>
-          </p:cNvSpPr>
-          <p:nvPr>
-            <p:ph type="title"/>
-          </p:nvPr>
-        </p:nvSpPr>
-        <p:spPr/>
-        <p:txBody>
-          <a:bodyPr/>
-          <a:lstStyle/>
-          <a:p>
-            <a:r>
-              <a:rPr lang="zh-CN" altLang="en-US" dirty="0"/>
-              <a:t>重构与性能</a:t>
-            </a:r>
-            <a:br>
-              <a:rPr lang="zh-CN" altLang="en-US" dirty="0"/>
-            </a:br>
-            <a:endParaRPr lang="en-CN" dirty="0"/>
-          </a:p>
-        </p:txBody>
-      </p:sp>
-      <p:sp>
-        <p:nvSpPr>
-          <p:cNvPr id="3" name="Content Placeholder 2">
-            <a:extLst>
-              <a:ext uri="{FF2B5EF4-FFF2-40B4-BE49-F238E27FC236}">
-                <a16:creationId xmlns:a16="http://schemas.microsoft.com/office/drawing/2014/main" id="{D0D488FD-8310-8D46-9217-B98FA6C52FFA}"/>
-              </a:ext>
-            </a:extLst>
-          </p:cNvPr>
-          <p:cNvSpPr>
-            <a:spLocks noGrp="1"/>
-          </p:cNvSpPr>
-          <p:nvPr>
-            <p:ph idx="1"/>
-          </p:nvPr>
-        </p:nvSpPr>
-        <p:spPr/>
-        <p:txBody>
-          <a:bodyPr>
-            <a:normAutofit fontScale="92500" lnSpcReduction="10000"/>
-          </a:bodyPr>
-          <a:lstStyle/>
-          <a:p>
-            <a:pPr marL="0" indent="0">
-              <a:lnSpc>
-                <a:spcPct val="70000"/>
-              </a:lnSpc>
-              <a:buNone/>
-            </a:pPr>
-            <a:endParaRPr lang="en-US" altLang="zh-CN" dirty="0"/>
-          </a:p>
-          <a:p>
-            <a:pPr>
-              <a:lnSpc>
-                <a:spcPct val="100000"/>
-              </a:lnSpc>
-            </a:pPr>
-            <a:r>
-              <a:rPr lang="en-CN" dirty="0">
-                <a:solidFill>
-                  <a:prstClr val="black"/>
-                </a:solidFill>
-              </a:rPr>
-              <a:t>多数重构提高性能</a:t>
-            </a:r>
-            <a:r>
-              <a:rPr lang="zh-CN" altLang="en-US" dirty="0">
-                <a:solidFill>
-                  <a:prstClr val="black"/>
-                </a:solidFill>
-              </a:rPr>
-              <a:t>，少数反而降低性能</a:t>
-            </a:r>
-            <a:endParaRPr lang="en-US" altLang="zh-CN" dirty="0">
-              <a:solidFill>
-                <a:prstClr val="black"/>
-              </a:solidFill>
-            </a:endParaRPr>
-          </a:p>
-          <a:p>
-            <a:pPr>
-              <a:lnSpc>
-                <a:spcPct val="100000"/>
-              </a:lnSpc>
-            </a:pPr>
-            <a:r>
-              <a:rPr lang="zh-CN" altLang="en-US" dirty="0">
-                <a:solidFill>
-                  <a:prstClr val="black"/>
-                </a:solidFill>
-              </a:rPr>
-              <a:t>重构能使得性能提高更容易</a:t>
-            </a:r>
-            <a:endParaRPr lang="en-CN" dirty="0">
-              <a:solidFill>
-                <a:prstClr val="black"/>
-              </a:solidFill>
-            </a:endParaRPr>
-          </a:p>
-          <a:p>
-            <a:pPr>
-              <a:lnSpc>
-                <a:spcPct val="100000"/>
-              </a:lnSpc>
-            </a:pPr>
-            <a:r>
-              <a:rPr lang="en-CN" dirty="0">
-                <a:solidFill>
-                  <a:prstClr val="black"/>
-                </a:solidFill>
-              </a:rPr>
-              <a:t>二八原则</a:t>
-            </a:r>
-          </a:p>
-          <a:p>
-            <a:pPr>
-              <a:lnSpc>
-                <a:spcPct val="100000"/>
-              </a:lnSpc>
-            </a:pPr>
-            <a:r>
-              <a:rPr lang="zh-CN" altLang="en-US" dirty="0">
-                <a:solidFill>
-                  <a:prstClr val="black"/>
-                </a:solidFill>
-              </a:rPr>
-              <a:t>集中测试</a:t>
-            </a:r>
-            <a:endParaRPr lang="en-US" altLang="zh-CN" dirty="0">
-              <a:solidFill>
-                <a:prstClr val="black"/>
-              </a:solidFill>
-            </a:endParaRPr>
-          </a:p>
-          <a:p>
-            <a:pPr>
-              <a:lnSpc>
-                <a:spcPct val="100000"/>
-              </a:lnSpc>
-            </a:pPr>
-            <a:r>
-              <a:rPr lang="zh-CN" altLang="en-CN" dirty="0">
-                <a:solidFill>
-                  <a:prstClr val="black"/>
-                </a:solidFill>
-              </a:rPr>
-              <a:t>测量</a:t>
-            </a:r>
-            <a:r>
-              <a:rPr lang="zh-CN" altLang="en-US" dirty="0">
-                <a:solidFill>
-                  <a:prstClr val="black"/>
-                </a:solidFill>
-              </a:rPr>
-              <a:t>工具</a:t>
-            </a:r>
-            <a:endParaRPr lang="en-US" altLang="zh-CN" dirty="0">
-              <a:solidFill>
-                <a:prstClr val="black"/>
-              </a:solidFill>
-            </a:endParaRPr>
-          </a:p>
-          <a:p>
-            <a:pPr>
-              <a:lnSpc>
-                <a:spcPct val="100000"/>
-              </a:lnSpc>
-            </a:pPr>
-            <a:r>
-              <a:rPr lang="zh-CN" altLang="en-US" dirty="0">
-                <a:solidFill>
-                  <a:prstClr val="black"/>
-                </a:solidFill>
-              </a:rPr>
-              <a:t>小幅度修改。每走一步，都需要编译、测试、再次度量。如果没有提高性能，应该撤销此次修改</a:t>
-            </a:r>
-            <a:endParaRPr lang="en-US" altLang="zh-CN" dirty="0">
-              <a:solidFill>
-                <a:prstClr val="black"/>
-              </a:solidFill>
-            </a:endParaRPr>
-          </a:p>
-          <a:p>
-            <a:pPr>
-              <a:lnSpc>
-                <a:spcPct val="100000"/>
-              </a:lnSpc>
-            </a:pPr>
-            <a:r>
-              <a:rPr lang="zh-CN" altLang="en-US" dirty="0">
-                <a:solidFill>
-                  <a:prstClr val="black"/>
-                </a:solidFill>
-              </a:rPr>
-              <a:t>持续提高</a:t>
-            </a:r>
-            <a:endParaRPr lang="en-US" altLang="zh-CN" dirty="0">
-              <a:solidFill>
-                <a:prstClr val="black"/>
-              </a:solidFill>
-            </a:endParaRPr>
-          </a:p>
-        </p:txBody>
-      </p:sp>
-    </p:spTree>
-    <p:extLst>
-      <p:ext uri="{BB962C8B-B14F-4D97-AF65-F5344CB8AC3E}">
-        <p14:creationId xmlns:p14="http://schemas.microsoft.com/office/powerpoint/2010/main" val="3459578394"/>
-      </p:ext>
-    </p:extLst>
-  </p:cSld>
-  <p:clrMapOvr>
-    <a:masterClrMapping/>
-  </p:clrMapOvr>
-</p:sld>
-</file>
-
-<file path=ppt/slides/slide4.xml><?xml version="1.0" encoding="utf-8"?>
-<p:sld xmlns:a="http://schemas.openxmlformats.org/drawingml/2006/main" xmlns:r="http://schemas.openxmlformats.org/officeDocument/2006/relationships" xmlns:p="http://schemas.openxmlformats.org/presentationml/2006/main">
-  <p:cSld>
-    <p:spTree>
-      <p:nvGrpSpPr>
-        <p:cNvPr id="1" name=""/>
-        <p:cNvGrpSpPr/>
-        <p:nvPr/>
-      </p:nvGrpSpPr>
-      <p:grpSpPr>
-        <a:xfrm>
-          <a:off x="0" y="0"/>
-          <a:ext cx="0" cy="0"/>
-          <a:chOff x="0" y="0"/>
-          <a:chExt cx="0" cy="0"/>
-        </a:xfrm>
-      </p:grpSpPr>
-      <p:sp>
-        <p:nvSpPr>
-          <p:cNvPr id="2" name="Title 1">
-            <a:extLst>
-              <a:ext uri="{FF2B5EF4-FFF2-40B4-BE49-F238E27FC236}">
-                <a16:creationId xmlns:a16="http://schemas.microsoft.com/office/drawing/2014/main" id="{313F1D7C-6BE7-7B40-9C87-94689DE3B2A8}"/>
-              </a:ext>
-            </a:extLst>
-          </p:cNvPr>
-          <p:cNvSpPr>
-            <a:spLocks noGrp="1"/>
-          </p:cNvSpPr>
-          <p:nvPr>
-            <p:ph type="title"/>
-          </p:nvPr>
-        </p:nvSpPr>
-        <p:spPr/>
-        <p:txBody>
-          <a:bodyPr/>
-          <a:lstStyle/>
-          <a:p>
-            <a:r>
-              <a:rPr lang="zh-CN" altLang="en-US" dirty="0"/>
-              <a:t>重构准备</a:t>
-            </a:r>
-            <a:endParaRPr lang="en-CN" dirty="0"/>
-          </a:p>
-        </p:txBody>
-      </p:sp>
-      <p:sp>
-        <p:nvSpPr>
-          <p:cNvPr id="3" name="Content Placeholder 2">
-            <a:extLst>
-              <a:ext uri="{FF2B5EF4-FFF2-40B4-BE49-F238E27FC236}">
-                <a16:creationId xmlns:a16="http://schemas.microsoft.com/office/drawing/2014/main" id="{9876854F-C029-014C-A678-115DAF583AC8}"/>
-              </a:ext>
-            </a:extLst>
-          </p:cNvPr>
-          <p:cNvSpPr>
-            <a:spLocks noGrp="1"/>
-          </p:cNvSpPr>
-          <p:nvPr>
-            <p:ph idx="1"/>
-          </p:nvPr>
-        </p:nvSpPr>
-        <p:spPr/>
-        <p:txBody>
-          <a:bodyPr>
-            <a:normAutofit fontScale="62500" lnSpcReduction="20000"/>
-          </a:bodyPr>
-          <a:lstStyle/>
-          <a:p>
-            <a:endParaRPr lang="zh-CN" altLang="en-US" dirty="0"/>
-          </a:p>
-          <a:p>
-            <a:r>
-              <a:rPr lang="zh-CN" altLang="en-US" dirty="0"/>
-              <a:t>重构之前，先有测试代码：自检能力 </a:t>
-            </a:r>
-            <a:r>
-              <a:rPr lang="en-US" altLang="zh-CN" dirty="0"/>
-              <a:t>/ </a:t>
-            </a:r>
-            <a:r>
-              <a:rPr lang="zh-CN" altLang="en-US" dirty="0"/>
-              <a:t>自测试</a:t>
-            </a:r>
-          </a:p>
-          <a:p>
-            <a:pPr marL="0" indent="0">
-              <a:buNone/>
-            </a:pPr>
-            <a:r>
-              <a:rPr lang="en-US" altLang="zh-CN" dirty="0"/>
-              <a:t>	</a:t>
-            </a:r>
-            <a:r>
-              <a:rPr lang="zh-CN" altLang="en-US" dirty="0"/>
-              <a:t>✔ 单元测试 </a:t>
-            </a:r>
-            <a:r>
-              <a:rPr lang="en-US" altLang="zh-CN" dirty="0"/>
-              <a:t>: </a:t>
-            </a:r>
-            <a:r>
-              <a:rPr lang="en-US" dirty="0"/>
-              <a:t>Junit ; </a:t>
-            </a:r>
-            <a:r>
-              <a:rPr lang="zh-CN" altLang="en-US" dirty="0"/>
-              <a:t>捕捉失败</a:t>
-            </a:r>
-            <a:r>
-              <a:rPr lang="en-US" altLang="zh-CN" dirty="0"/>
-              <a:t>(</a:t>
-            </a:r>
-            <a:r>
-              <a:rPr lang="en-US" dirty="0"/>
-              <a:t>false)/ </a:t>
-            </a:r>
-            <a:r>
-              <a:rPr lang="zh-CN" altLang="en-US" dirty="0"/>
-              <a:t>异常</a:t>
-            </a:r>
-            <a:r>
-              <a:rPr lang="en-US" altLang="zh-CN" dirty="0"/>
-              <a:t>(</a:t>
-            </a:r>
-            <a:r>
-              <a:rPr lang="en-US" dirty="0"/>
-              <a:t>exception)</a:t>
-            </a:r>
-          </a:p>
-          <a:p>
-            <a:pPr marL="0" indent="0">
-              <a:buNone/>
-            </a:pPr>
-            <a:r>
-              <a:rPr lang="en-US" dirty="0"/>
-              <a:t>	✗ </a:t>
-            </a:r>
-            <a:r>
-              <a:rPr lang="zh-CN" altLang="en-US" dirty="0"/>
-              <a:t>功能测试：质量</a:t>
-            </a:r>
-          </a:p>
-          <a:p>
-            <a:pPr marL="0" indent="0">
-              <a:buNone/>
-            </a:pPr>
-            <a:r>
-              <a:rPr lang="en-US" dirty="0"/>
-              <a:t>	Not all public </a:t>
-            </a:r>
-            <a:r>
-              <a:rPr lang="zh-CN" altLang="en-US" dirty="0"/>
-              <a:t>函数 </a:t>
-            </a:r>
-          </a:p>
-          <a:p>
-            <a:pPr marL="0" indent="0">
-              <a:buNone/>
-            </a:pPr>
-            <a:r>
-              <a:rPr lang="en-US" altLang="zh-CN" dirty="0"/>
-              <a:t>	</a:t>
-            </a:r>
-            <a:r>
-              <a:rPr lang="zh-CN" altLang="en-US" dirty="0"/>
-              <a:t> 边界条件 </a:t>
-            </a:r>
-            <a:r>
-              <a:rPr lang="en-US" altLang="zh-CN" dirty="0"/>
-              <a:t>/</a:t>
-            </a:r>
-          </a:p>
-          <a:p>
-            <a:pPr marL="0" indent="0">
-              <a:buNone/>
-            </a:pPr>
-            <a:r>
-              <a:rPr lang="en-US" altLang="zh-CN" dirty="0"/>
-              <a:t>	</a:t>
-            </a:r>
-            <a:r>
-              <a:rPr lang="zh-CN" altLang="en-US" dirty="0"/>
-              <a:t>最容易出错</a:t>
-            </a:r>
-            <a:r>
-              <a:rPr lang="en-US" altLang="zh-CN" dirty="0"/>
-              <a:t>/ </a:t>
-            </a:r>
-            <a:r>
-              <a:rPr lang="zh-CN" altLang="en-US" dirty="0"/>
-              <a:t>最常见</a:t>
-            </a:r>
-            <a:r>
-              <a:rPr lang="en-US" altLang="zh-CN" dirty="0"/>
-              <a:t>/</a:t>
-            </a:r>
-            <a:r>
-              <a:rPr lang="zh-CN" altLang="en-US" dirty="0"/>
-              <a:t>常见情况</a:t>
-            </a:r>
-          </a:p>
-          <a:p>
-            <a:pPr marL="0" indent="0">
-              <a:buNone/>
-            </a:pPr>
-            <a:r>
-              <a:rPr lang="en-US" altLang="zh-CN" dirty="0"/>
-              <a:t>	</a:t>
-            </a:r>
-            <a:r>
-              <a:rPr lang="zh-CN" altLang="en-US" dirty="0"/>
-              <a:t>如果没有</a:t>
-            </a:r>
-            <a:r>
-              <a:rPr lang="en-US" dirty="0"/>
-              <a:t>Unit Test，</a:t>
-            </a:r>
-            <a:r>
-              <a:rPr lang="zh-CN" altLang="en-US" dirty="0"/>
-              <a:t>用测试用例</a:t>
-            </a:r>
-            <a:r>
-              <a:rPr lang="en-US" altLang="zh-CN" dirty="0"/>
-              <a:t>+</a:t>
-            </a:r>
-            <a:r>
-              <a:rPr lang="zh-CN" altLang="en-US" dirty="0"/>
-              <a:t>应用场景：</a:t>
-            </a:r>
-            <a:r>
-              <a:rPr lang="en-US" dirty="0"/>
-              <a:t>all case</a:t>
-            </a:r>
-          </a:p>
-          <a:p>
-            <a:pPr marL="0" indent="0">
-              <a:buNone/>
-            </a:pPr>
-            <a:r>
-              <a:rPr lang="en-US" dirty="0"/>
-              <a:t> </a:t>
-            </a:r>
-          </a:p>
-          <a:p>
-            <a:r>
-              <a:rPr lang="en-US" dirty="0"/>
-              <a:t>Diff tool</a:t>
-            </a:r>
-          </a:p>
-          <a:p>
-            <a:pPr marL="0" indent="0">
-              <a:buNone/>
-            </a:pPr>
-            <a:r>
-              <a:rPr lang="en-US" dirty="0"/>
-              <a:t>	Beyond Compare, IDE</a:t>
-            </a:r>
-          </a:p>
-          <a:p>
-            <a:r>
-              <a:rPr lang="en-US" dirty="0"/>
-              <a:t>Branch</a:t>
-            </a:r>
-          </a:p>
-          <a:p>
-            <a:pPr marL="0" indent="0">
-              <a:buNone/>
-            </a:pPr>
-            <a:r>
-              <a:rPr lang="en-US" dirty="0"/>
-              <a:t>	</a:t>
-            </a:r>
-            <a:r>
-              <a:rPr lang="en-US" dirty="0" err="1"/>
-              <a:t>refactor_current</a:t>
-            </a:r>
-            <a:r>
-              <a:rPr lang="en-US" dirty="0"/>
-              <a:t> / </a:t>
-            </a:r>
-            <a:r>
-              <a:rPr lang="en-US" dirty="0" err="1"/>
-              <a:t>refactor_master</a:t>
-            </a:r>
-            <a:r>
-              <a:rPr lang="en-US" dirty="0"/>
-              <a:t> / feature</a:t>
-            </a:r>
-          </a:p>
-          <a:p>
-            <a:endParaRPr lang="en-US" dirty="0"/>
-          </a:p>
-          <a:p>
-            <a:endParaRPr lang="en-US" dirty="0"/>
-          </a:p>
-          <a:p>
-            <a:endParaRPr lang="en-CN" dirty="0"/>
-          </a:p>
-        </p:txBody>
-      </p:sp>
-    </p:spTree>
-    <p:extLst>
-      <p:ext uri="{BB962C8B-B14F-4D97-AF65-F5344CB8AC3E}">
-        <p14:creationId xmlns:p14="http://schemas.microsoft.com/office/powerpoint/2010/main" val="475951304"/>
-      </p:ext>
-    </p:extLst>
-  </p:cSld>
-  <p:clrMapOvr>
-    <a:masterClrMapping/>
-  </p:clrMapOvr>
-</p:sld>
-</file>
-
-<file path=ppt/slides/slide5.xml><?xml version="1.0" encoding="utf-8"?>
-<p:sld xmlns:a="http://schemas.openxmlformats.org/drawingml/2006/main" xmlns:r="http://schemas.openxmlformats.org/officeDocument/2006/relationships" xmlns:p="http://schemas.openxmlformats.org/presentationml/2006/main">
-  <p:cSld>
-    <p:spTree>
-      <p:nvGrpSpPr>
-        <p:cNvPr id="1" name=""/>
-        <p:cNvGrpSpPr/>
-        <p:nvPr/>
-      </p:nvGrpSpPr>
-      <p:grpSpPr>
-        <a:xfrm>
-          <a:off x="0" y="0"/>
-          <a:ext cx="0" cy="0"/>
-          <a:chOff x="0" y="0"/>
-          <a:chExt cx="0" cy="0"/>
-        </a:xfrm>
-      </p:grpSpPr>
-      <p:sp>
-        <p:nvSpPr>
-          <p:cNvPr id="2" name="Title 1">
-            <a:extLst>
-              <a:ext uri="{FF2B5EF4-FFF2-40B4-BE49-F238E27FC236}">
-                <a16:creationId xmlns:a16="http://schemas.microsoft.com/office/drawing/2014/main" id="{0A52C904-145F-1745-A9C5-A07EFCBDD4ED}"/>
-              </a:ext>
-            </a:extLst>
-          </p:cNvPr>
-          <p:cNvSpPr>
-            <a:spLocks noGrp="1"/>
-          </p:cNvSpPr>
-          <p:nvPr>
-            <p:ph type="title"/>
-          </p:nvPr>
-        </p:nvSpPr>
-        <p:spPr/>
-        <p:txBody>
-          <a:bodyPr/>
-          <a:lstStyle/>
-          <a:p>
-            <a:r>
-              <a:rPr lang="zh-CN" altLang="en-US" dirty="0"/>
-              <a:t>重构时</a:t>
-            </a:r>
-            <a:endParaRPr lang="en-CN" dirty="0"/>
-          </a:p>
-        </p:txBody>
-      </p:sp>
-      <p:sp>
-        <p:nvSpPr>
-          <p:cNvPr id="3" name="Content Placeholder 2">
-            <a:extLst>
-              <a:ext uri="{FF2B5EF4-FFF2-40B4-BE49-F238E27FC236}">
-                <a16:creationId xmlns:a16="http://schemas.microsoft.com/office/drawing/2014/main" id="{8E577437-25A1-554A-8656-E7825C0C6C7C}"/>
-              </a:ext>
-            </a:extLst>
-          </p:cNvPr>
-          <p:cNvSpPr>
-            <a:spLocks noGrp="1"/>
-          </p:cNvSpPr>
-          <p:nvPr>
-            <p:ph idx="1"/>
-          </p:nvPr>
-        </p:nvSpPr>
-        <p:spPr/>
-        <p:txBody>
-          <a:bodyPr/>
-          <a:lstStyle/>
-          <a:p>
-            <a:r>
-              <a:rPr lang="zh-CN" altLang="en-US" dirty="0"/>
-              <a:t>两顶帽子：添加新功能（修改），以及重构</a:t>
-            </a:r>
-          </a:p>
-          <a:p>
-            <a:pPr marL="0" indent="0">
-              <a:buNone/>
-            </a:pPr>
-            <a:r>
-              <a:rPr lang="zh-CN" altLang="en-US" dirty="0"/>
-              <a:t>软件开发过程中，经常变化帽子，但无论何时只能戴有一顶帽子。</a:t>
-            </a:r>
-            <a:endParaRPr lang="en-US" altLang="zh-CN" dirty="0"/>
-          </a:p>
-          <a:p>
-            <a:pPr marL="0" indent="0">
-              <a:buNone/>
-            </a:pPr>
-            <a:endParaRPr lang="zh-CN" altLang="en-US" dirty="0"/>
-          </a:p>
-          <a:p>
-            <a:r>
-              <a:rPr lang="zh-CN" altLang="en-US" dirty="0"/>
-              <a:t>小步前进、频繁测试</a:t>
-            </a:r>
-            <a:endParaRPr lang="en-CN" dirty="0"/>
-          </a:p>
-        </p:txBody>
-      </p:sp>
-    </p:spTree>
-    <p:extLst>
-      <p:ext uri="{BB962C8B-B14F-4D97-AF65-F5344CB8AC3E}">
-        <p14:creationId xmlns:p14="http://schemas.microsoft.com/office/powerpoint/2010/main" val="827538509"/>
-      </p:ext>
-    </p:extLst>
-  </p:cSld>
-  <p:clrMapOvr>
-    <a:masterClrMapping/>
-  </p:clrMapOvr>
-</p:sld>
-</file>
-
-<file path=ppt/slides/slide6.xml><?xml version="1.0" encoding="utf-8"?>
-<p:sld xmlns:a="http://schemas.openxmlformats.org/drawingml/2006/main" xmlns:r="http://schemas.openxmlformats.org/officeDocument/2006/relationships" xmlns:p="http://schemas.openxmlformats.org/presentationml/2006/main">
-  <p:cSld>
-    <p:spTree>
-      <p:nvGrpSpPr>
-        <p:cNvPr id="1" name=""/>
-        <p:cNvGrpSpPr/>
-        <p:nvPr/>
-      </p:nvGrpSpPr>
-      <p:grpSpPr>
-        <a:xfrm>
-          <a:off x="0" y="0"/>
-          <a:ext cx="0" cy="0"/>
-          <a:chOff x="0" y="0"/>
-          <a:chExt cx="0" cy="0"/>
-        </a:xfrm>
-      </p:grpSpPr>
-      <p:sp>
-        <p:nvSpPr>
-          <p:cNvPr id="2" name="Title 1">
-            <a:extLst>
-              <a:ext uri="{FF2B5EF4-FFF2-40B4-BE49-F238E27FC236}">
-                <a16:creationId xmlns:a16="http://schemas.microsoft.com/office/drawing/2014/main" id="{75A270D7-9825-D14B-898C-841509BD4F30}"/>
-              </a:ext>
-            </a:extLst>
-          </p:cNvPr>
-          <p:cNvSpPr>
-            <a:spLocks noGrp="1"/>
-          </p:cNvSpPr>
-          <p:nvPr>
-            <p:ph type="title"/>
-          </p:nvPr>
-        </p:nvSpPr>
-        <p:spPr/>
-        <p:txBody>
-          <a:bodyPr/>
-          <a:lstStyle/>
-          <a:p>
-            <a:r>
-              <a:rPr lang="en-US" dirty="0"/>
-              <a:t>Problem in  refactoring</a:t>
-            </a:r>
-            <a:endParaRPr lang="en-CN" dirty="0"/>
-          </a:p>
-        </p:txBody>
-      </p:sp>
-      <p:sp>
-        <p:nvSpPr>
-          <p:cNvPr id="3" name="Content Placeholder 2">
-            <a:extLst>
-              <a:ext uri="{FF2B5EF4-FFF2-40B4-BE49-F238E27FC236}">
-                <a16:creationId xmlns:a16="http://schemas.microsoft.com/office/drawing/2014/main" id="{BD1DED41-D96A-8E44-8967-AB5C7C6A6728}"/>
-              </a:ext>
-            </a:extLst>
-          </p:cNvPr>
-          <p:cNvSpPr>
-            <a:spLocks noGrp="1"/>
-          </p:cNvSpPr>
-          <p:nvPr>
-            <p:ph idx="1"/>
-          </p:nvPr>
-        </p:nvSpPr>
-        <p:spPr/>
-        <p:txBody>
-          <a:bodyPr>
-            <a:normAutofit fontScale="92500" lnSpcReduction="20000"/>
-          </a:bodyPr>
-          <a:lstStyle/>
-          <a:p>
-            <a:endParaRPr lang="en-US" dirty="0"/>
-          </a:p>
-          <a:p>
-            <a:r>
-              <a:rPr lang="zh-CN" altLang="en-US" dirty="0"/>
-              <a:t>数据库</a:t>
-            </a:r>
-          </a:p>
-          <a:p>
-            <a:r>
-              <a:rPr lang="zh-CN" altLang="en-US" dirty="0"/>
-              <a:t>接口 </a:t>
-            </a:r>
-            <a:r>
-              <a:rPr lang="en-US" altLang="zh-CN" dirty="0"/>
-              <a:t>: </a:t>
-            </a:r>
-            <a:r>
-              <a:rPr lang="en-US" dirty="0"/>
-              <a:t>public / </a:t>
-            </a:r>
-            <a:r>
-              <a:rPr lang="en-US" dirty="0" err="1"/>
-              <a:t>pushlished</a:t>
-            </a:r>
-            <a:r>
-              <a:rPr lang="en-US" dirty="0"/>
-              <a:t> interface</a:t>
-            </a:r>
-          </a:p>
-          <a:p>
-            <a:r>
-              <a:rPr lang="zh-CN" altLang="en-US" dirty="0"/>
-              <a:t>难以通过重构手法完成的设计改动</a:t>
-            </a:r>
-          </a:p>
-          <a:p>
-            <a:r>
-              <a:rPr lang="zh-CN" altLang="en-US" dirty="0">
-                <a:solidFill>
-                  <a:srgbClr val="FF0000"/>
-                </a:solidFill>
-              </a:rPr>
-              <a:t>本书中重构手法的前提：“单进程软件”，并不适合并发和分布式程序设计。</a:t>
-            </a:r>
-          </a:p>
-          <a:p>
-            <a:pPr marL="0" indent="0">
-              <a:buNone/>
-            </a:pPr>
-            <a:r>
-              <a:rPr lang="en-US" altLang="zh-CN" dirty="0">
-                <a:solidFill>
-                  <a:srgbClr val="FF0000"/>
-                </a:solidFill>
-              </a:rPr>
-              <a:t>   </a:t>
-            </a:r>
-            <a:r>
-              <a:rPr lang="zh-CN" altLang="en-US" dirty="0">
-                <a:solidFill>
-                  <a:srgbClr val="FF0000"/>
-                </a:solidFill>
-              </a:rPr>
-              <a:t>并发和分布式程序设计，有着完全不同的重构技术。</a:t>
-            </a:r>
-          </a:p>
-          <a:p>
-            <a:endParaRPr lang="zh-CN" altLang="en-US" dirty="0"/>
-          </a:p>
-          <a:p>
-            <a:r>
-              <a:rPr lang="zh-CN" altLang="en-US" dirty="0"/>
-              <a:t>寻找引用点</a:t>
-            </a:r>
-          </a:p>
-          <a:p>
-            <a:pPr marL="0" indent="0">
-              <a:buNone/>
-            </a:pPr>
-            <a:r>
-              <a:rPr lang="en-US" altLang="zh-CN" dirty="0"/>
-              <a:t>  </a:t>
-            </a:r>
-            <a:r>
-              <a:rPr lang="zh-CN" altLang="en-US" dirty="0"/>
-              <a:t>替换 ： 手动 </a:t>
-            </a:r>
-            <a:r>
-              <a:rPr lang="en-US" altLang="zh-CN" dirty="0"/>
-              <a:t>/ </a:t>
-            </a:r>
-            <a:r>
-              <a:rPr lang="en-US" dirty="0"/>
-              <a:t>Diff tool </a:t>
-            </a:r>
-          </a:p>
-          <a:p>
-            <a:pPr marL="0" indent="0">
-              <a:buNone/>
-            </a:pPr>
-            <a:r>
-              <a:rPr lang="en-US" altLang="zh-CN" dirty="0"/>
-              <a:t>  </a:t>
-            </a:r>
-            <a:r>
-              <a:rPr lang="zh-CN" altLang="en-US" dirty="0"/>
-              <a:t>查找 ： 反射</a:t>
-            </a:r>
-          </a:p>
-          <a:p>
-            <a:endParaRPr lang="zh-CN" altLang="en-US" dirty="0"/>
-          </a:p>
-          <a:p>
-            <a:endParaRPr lang="zh-CN" altLang="en-US" dirty="0"/>
-          </a:p>
-          <a:p>
-            <a:endParaRPr lang="en-CN" dirty="0"/>
-          </a:p>
-        </p:txBody>
-      </p:sp>
-    </p:spTree>
-    <p:extLst>
-      <p:ext uri="{BB962C8B-B14F-4D97-AF65-F5344CB8AC3E}">
-        <p14:creationId xmlns:p14="http://schemas.microsoft.com/office/powerpoint/2010/main" val="1627292905"/>
-      </p:ext>
-    </p:extLst>
-  </p:cSld>
-  <p:clrMapOvr>
-    <a:masterClrMapping/>
-  </p:clrMapOvr>
-</p:sld>
-</file>
-
-<file path=ppt/slides/slide7.xml><?xml version="1.0" encoding="utf-8"?>
-<p:sld xmlns:a="http://schemas.openxmlformats.org/drawingml/2006/main" xmlns:r="http://schemas.openxmlformats.org/officeDocument/2006/relationships" xmlns:p="http://schemas.openxmlformats.org/presentationml/2006/main">
-  <p:cSld>
-    <p:spTree>
-      <p:nvGrpSpPr>
-        <p:cNvPr id="1" name=""/>
-        <p:cNvGrpSpPr/>
-        <p:nvPr/>
-      </p:nvGrpSpPr>
-      <p:grpSpPr>
-        <a:xfrm>
-          <a:off x="0" y="0"/>
-          <a:ext cx="0" cy="0"/>
-          <a:chOff x="0" y="0"/>
-          <a:chExt cx="0" cy="0"/>
-        </a:xfrm>
-      </p:grpSpPr>
-      <p:sp>
-        <p:nvSpPr>
-          <p:cNvPr id="2" name="Title 1">
-            <a:extLst>
-              <a:ext uri="{FF2B5EF4-FFF2-40B4-BE49-F238E27FC236}">
-                <a16:creationId xmlns:a16="http://schemas.microsoft.com/office/drawing/2014/main" id="{0EDA4548-CA9B-4245-A98D-8C8CAA7A2199}"/>
-              </a:ext>
-            </a:extLst>
-          </p:cNvPr>
-          <p:cNvSpPr>
-            <a:spLocks noGrp="1"/>
-          </p:cNvSpPr>
-          <p:nvPr>
-            <p:ph type="title"/>
-          </p:nvPr>
-        </p:nvSpPr>
-        <p:spPr/>
-        <p:txBody>
-          <a:bodyPr/>
-          <a:lstStyle/>
-          <a:p>
-            <a:r>
-              <a:rPr lang="en-US" altLang="zh-CN" dirty="0"/>
-              <a:t>+</a:t>
-            </a:r>
-            <a:r>
-              <a:rPr lang="zh-CN" altLang="en-US" dirty="0"/>
-              <a:t> </a:t>
-            </a:r>
-            <a:r>
-              <a:rPr lang="en-CN" dirty="0"/>
-              <a:t>QA</a:t>
-            </a:r>
-          </a:p>
-        </p:txBody>
-      </p:sp>
-      <p:sp>
-        <p:nvSpPr>
-          <p:cNvPr id="3" name="Content Placeholder 2">
-            <a:extLst>
-              <a:ext uri="{FF2B5EF4-FFF2-40B4-BE49-F238E27FC236}">
-                <a16:creationId xmlns:a16="http://schemas.microsoft.com/office/drawing/2014/main" id="{5B33604C-DB0C-504C-8E80-857E7A949477}"/>
-              </a:ext>
-            </a:extLst>
-          </p:cNvPr>
-          <p:cNvSpPr>
-            <a:spLocks noGrp="1"/>
-          </p:cNvSpPr>
-          <p:nvPr>
-            <p:ph idx="1"/>
-          </p:nvPr>
-        </p:nvSpPr>
-        <p:spPr/>
-        <p:txBody>
-          <a:bodyPr>
-            <a:noAutofit/>
-          </a:bodyPr>
-          <a:lstStyle/>
-          <a:p>
-            <a:r>
-              <a:rPr lang="zh-CN" altLang="en-US" sz="2000" dirty="0"/>
-              <a:t>平时开发中需要如何设计代码结构，做到以后尽量少或者小的重构？</a:t>
-            </a:r>
-            <a:endParaRPr lang="en-US" altLang="zh-CN" sz="2000" dirty="0"/>
-          </a:p>
-          <a:p>
-            <a:pPr marL="0" indent="0">
-              <a:buNone/>
-            </a:pPr>
-            <a:r>
-              <a:rPr lang="zh-CN" altLang="en-US" sz="2000" dirty="0"/>
-              <a:t>  不能</a:t>
-            </a:r>
-            <a:endParaRPr lang="en-US" altLang="zh-CN" sz="2000" dirty="0"/>
-          </a:p>
-          <a:p>
-            <a:pPr marL="0" indent="0">
-              <a:buNone/>
-            </a:pPr>
-            <a:r>
-              <a:rPr lang="zh-CN" altLang="en-US" sz="2000" dirty="0"/>
-              <a:t>  架构</a:t>
-            </a:r>
-            <a:endParaRPr lang="en-US" altLang="zh-CN" sz="2000" dirty="0"/>
-          </a:p>
-          <a:p>
-            <a:pPr marL="0" indent="0">
-              <a:buNone/>
-            </a:pPr>
-            <a:endParaRPr lang="en-US" altLang="zh-CN" sz="2000" dirty="0"/>
-          </a:p>
-          <a:p>
-            <a:r>
-              <a:rPr lang="zh-CN" altLang="en-US" sz="2000" dirty="0"/>
-              <a:t>重构 在</a:t>
-            </a:r>
-            <a:r>
-              <a:rPr lang="en-US" altLang="zh-CN" sz="2000" dirty="0"/>
-              <a:t>JS</a:t>
-            </a:r>
-            <a:r>
-              <a:rPr lang="zh-CN" altLang="en-US" sz="2000" dirty="0"/>
-              <a:t> 中能用吗？</a:t>
-            </a:r>
-            <a:endParaRPr lang="en-US" altLang="zh-CN" sz="2000" dirty="0"/>
-          </a:p>
-          <a:p>
-            <a:pPr marL="0" indent="0">
-              <a:buNone/>
-            </a:pPr>
-            <a:r>
-              <a:rPr lang="zh-CN" altLang="en-US" sz="2000" dirty="0"/>
-              <a:t>     任何语言</a:t>
-            </a:r>
-            <a:endParaRPr lang="en-US" altLang="zh-CN" sz="2000" dirty="0"/>
-          </a:p>
-          <a:p>
-            <a:pPr marL="0" indent="0">
-              <a:buNone/>
-            </a:pPr>
-            <a:r>
-              <a:rPr lang="zh-CN" altLang="en-US" sz="2000" dirty="0"/>
-              <a:t> </a:t>
-            </a:r>
-            <a:endParaRPr lang="en-US" altLang="zh-CN" sz="2000" dirty="0"/>
-          </a:p>
-          <a:p>
-            <a:r>
-              <a:rPr lang="zh-CN" altLang="en-US" sz="2000" dirty="0"/>
-              <a:t>项目架构非常</a:t>
-            </a:r>
-            <a:r>
-              <a:rPr lang="en-US" altLang="zh-CN" sz="2000" dirty="0"/>
-              <a:t>common</a:t>
-            </a:r>
-            <a:r>
-              <a:rPr lang="zh-CN" altLang="en-US" sz="2000" dirty="0"/>
-              <a:t>，不能一下子改完，该如何着手重构？</a:t>
-            </a:r>
-            <a:endParaRPr lang="en-US" altLang="zh-CN" sz="2000" dirty="0"/>
-          </a:p>
-          <a:p>
-            <a:pPr marL="0" indent="0">
-              <a:buNone/>
-            </a:pPr>
-            <a:r>
-              <a:rPr lang="zh-CN" altLang="en-US" sz="2000" dirty="0"/>
-              <a:t>    重构架构是超大范围的重构，即使使用重构手法也不能一下子改完。</a:t>
-            </a:r>
-            <a:endParaRPr lang="en-US" altLang="zh-CN" sz="2000" dirty="0"/>
-          </a:p>
-          <a:p>
-            <a:pPr marL="0" indent="0">
-              <a:buNone/>
-            </a:pPr>
-            <a:r>
-              <a:rPr lang="zh-CN" altLang="en-US" sz="2000" dirty="0"/>
-              <a:t>    逐个替换</a:t>
-            </a:r>
-            <a:r>
-              <a:rPr lang="en-US" altLang="zh-CN" sz="2000" dirty="0"/>
-              <a:t>+</a:t>
-            </a:r>
-            <a:r>
-              <a:rPr lang="zh-CN" altLang="en-US" sz="2000" dirty="0"/>
-              <a:t>测试用例</a:t>
-            </a:r>
-            <a:endParaRPr lang="en-US" altLang="zh-CN" sz="2000" dirty="0"/>
-          </a:p>
-          <a:p>
-            <a:pPr marL="0" indent="0">
-              <a:buNone/>
-            </a:pPr>
-            <a:r>
-              <a:rPr lang="zh-CN" altLang="en-US" sz="2000" dirty="0"/>
-              <a:t>    用重构按小步调和布局范围改善代码，使得代码清晰，能帮助找到更好的架构。</a:t>
-            </a:r>
-            <a:endParaRPr lang="en-CN" sz="2000" dirty="0"/>
-          </a:p>
-        </p:txBody>
-      </p:sp>
-    </p:spTree>
-    <p:extLst>
-      <p:ext uri="{BB962C8B-B14F-4D97-AF65-F5344CB8AC3E}">
-        <p14:creationId xmlns:p14="http://schemas.microsoft.com/office/powerpoint/2010/main" val="529310518"/>
-      </p:ext>
-    </p:extLst>
-  </p:cSld>
-  <p:clrMapOvr>
-    <a:masterClrMapping/>
-  </p:clrMapOvr>
-</p:sld>
-</file>
-
-<file path=ppt/slides/slide8.xml><?xml version="1.0" encoding="utf-8"?>
-<p:sld xmlns:a="http://schemas.openxmlformats.org/drawingml/2006/main" xmlns:r="http://schemas.openxmlformats.org/officeDocument/2006/relationships" xmlns:p="http://schemas.openxmlformats.org/presentationml/2006/main">
-  <p:cSld>
-    <p:spTree>
-      <p:nvGrpSpPr>
-        <p:cNvPr id="1" name=""/>
-        <p:cNvGrpSpPr/>
-        <p:nvPr/>
-      </p:nvGrpSpPr>
-      <p:grpSpPr>
-        <a:xfrm>
-          <a:off x="0" y="0"/>
-          <a:ext cx="0" cy="0"/>
-          <a:chOff x="0" y="0"/>
-          <a:chExt cx="0" cy="0"/>
-        </a:xfrm>
-      </p:grpSpPr>
-      <p:sp>
-        <p:nvSpPr>
-          <p:cNvPr id="2" name="Title 1">
-            <a:extLst>
-              <a:ext uri="{FF2B5EF4-FFF2-40B4-BE49-F238E27FC236}">
                 <a16:creationId xmlns:a16="http://schemas.microsoft.com/office/drawing/2014/main" id="{B1251E48-0CAE-E940-98C2-89A57854692F}"/>
               </a:ext>
             </a:extLst>
@@ -5206,7 +3962,7 @@
         </p:nvGraphicFramePr>
         <p:xfrm>
           <a:off x="838200" y="1825625"/>
-          <a:ext cx="10515600" cy="3708400"/>
+          <a:ext cx="10515601" cy="3708400"/>
         </p:xfrm>
         <a:graphic>
           <a:graphicData uri="http://schemas.openxmlformats.org/drawingml/2006/table">
@@ -5215,21 +3971,21 @@
                 <a:tableStyleId>{5C22544A-7EE6-4342-B048-85BDC9FD1C3A}</a:tableStyleId>
               </a:tblPr>
               <a:tblGrid>
-                <a:gridCol w="576943">
+                <a:gridCol w="576944">
                   <a:extLst>
                     <a:ext uri="{9D8B030D-6E8A-4147-A177-3AD203B41FA5}">
                       <a16:colId xmlns:a16="http://schemas.microsoft.com/office/drawing/2014/main" val="745997973"/>
                     </a:ext>
                   </a:extLst>
                 </a:gridCol>
-                <a:gridCol w="6433457">
+                <a:gridCol w="6433456">
                   <a:extLst>
                     <a:ext uri="{9D8B030D-6E8A-4147-A177-3AD203B41FA5}">
                       <a16:colId xmlns:a16="http://schemas.microsoft.com/office/drawing/2014/main" val="2647250386"/>
                     </a:ext>
                   </a:extLst>
                 </a:gridCol>
-                <a:gridCol w="3505200">
+                <a:gridCol w="3505201">
                   <a:extLst>
                     <a:ext uri="{9D8B030D-6E8A-4147-A177-3AD203B41FA5}">
                       <a16:colId xmlns:a16="http://schemas.microsoft.com/office/drawing/2014/main" val="44557382"/>
@@ -6354,7 +5110,7 @@
 </p:sld>
 </file>
 
-<file path=ppt/slides/slide9.xml><?xml version="1.0" encoding="utf-8"?>
+<file path=ppt/slides/slide3.xml><?xml version="1.0" encoding="utf-8"?>
 <p:sld xmlns:a="http://schemas.openxmlformats.org/drawingml/2006/main" xmlns:r="http://schemas.openxmlformats.org/officeDocument/2006/relationships" xmlns:p="http://schemas.openxmlformats.org/presentationml/2006/main">
   <p:cSld>
     <p:spTree>
@@ -6438,7 +5194,7 @@
         </p:nvGraphicFramePr>
         <p:xfrm>
           <a:off x="838200" y="1825625"/>
-          <a:ext cx="10515600" cy="3332480"/>
+          <a:ext cx="10515601" cy="3332480"/>
         </p:xfrm>
         <a:graphic>
           <a:graphicData uri="http://schemas.openxmlformats.org/drawingml/2006/table">
@@ -6461,7 +5217,7 @@
                     </a:ext>
                   </a:extLst>
                 </a:gridCol>
-                <a:gridCol w="3505200">
+                <a:gridCol w="3505201">
                   <a:extLst>
                     <a:ext uri="{9D8B030D-6E8A-4147-A177-3AD203B41FA5}">
                       <a16:colId xmlns:a16="http://schemas.microsoft.com/office/drawing/2014/main" val="4292055977"/>
